--- a/douyin-cover/抖音封面模板.pptx
+++ b/douyin-cover/抖音封面模板.pptx
@@ -113,7 +113,7 @@
   <p:extLst>
     <p:ext uri="{521415D9-36F7-43E2-AB2F-B90AF26B5E84}">
       <p14:sectionLst xmlns:p14="http://schemas.microsoft.com/office/powerpoint/2010/main">
-        <p14:section name="使用说明" id="{9961c0f6-fc8d-78b9-dc21-1c585664bfce}">
+        <p14:section name="使用说明" id="{1dd85d2c-24e8-272a-1e9f-9c1112494566}">
           <p14:sldIdLst>
             <p14:sldId id="256"/>
             <p14:sldId id="257"/>
@@ -121,7 +121,7 @@
             <p14:sldId id="259"/>
           </p14:sldIdLst>
         </p14:section>
-        <p14:section name="封面模板" id="{65176ce3-18c7-3a13-095f-7edd591898bd}">
+        <p14:section name="封面模板" id="{2c1011c7-2198-4fe3-068f-a36edb0460bb}">
           <p14:sldIdLst>
             <p14:sldId id="260"/>
             <p14:sldId id="261"/>
@@ -884,13 +884,12 @@
           <a:p>
             <a:r>
               <a:rPr lang="en-US" dirty="0"/>
-              <a:t>模板 A「黑金典藏」使用方法：
+              <a:t>模板 A「暗夜画廊」使用方法：
 1. 左侧缩略图右键这一页 →「复制幻灯片」，在副本上改，原模板留着下次用。
-2. 点表盘位置选中照片 → 右键「更改图片」→ 选新照片。位置不准就用「裁剪」拖动对齐。
-   点不中照片时：开始 → 选择 → 选择窗格，点「手表照片」。
-   对位时可在选择窗格里显示「构图参考线」，导出前一定要再隐藏。
-3. 直接点文字修改：店名、期数、品牌、型号、服务项目。字多了会自动缩小。
-4. 导出：文件 → 导出 → 更改文件类型 → PNG → 仅当前幻灯片（1080×1440）。
+2. 换照片：右键照片 →「更改图片」→ 选新照片；或者选中照片按 Delete，再点画框中间的图标插入，会自动裁成画框大小。
+3. 调位置：双击照片 →「裁剪」，拖动照片让表盘居中。可在「开始 → 选择 → 选择窗格」显示「构图参考线」对位，导出前再隐藏。
+4. 直接点文字修改：店名、期数、品牌、型号、服务项目。字多了会自动缩小。
+5. 导出：文件 → 导出 → 更改文件类型 → PNG → 仅当前幻灯片（1080×1440）。
    WPS：文件 → 输出为图片 → 当前页；或 另存为 → PNG。</a:t>
             </a:r>
             <a:endParaRPr lang="en-US" dirty="0"/>
@@ -979,13 +978,12 @@
           <a:p>
             <a:r>
               <a:rPr lang="en-US" dirty="0"/>
-              <a:t>模板 B「工坊硬核」使用方法：
+              <a:t>模板 B「象牙画册」使用方法：
 1. 左侧缩略图右键这一页 →「复制幻灯片」，在副本上改，原模板留着下次用。
-2. 点表盘位置选中照片 → 右键「更改图片」→ 选新照片。位置不准就用「裁剪」拖动对齐。
-   点不中照片时：开始 → 选择 → 选择窗格，点「手表照片」。
-   对位时可在选择窗格里显示「构图参考线」，导出前一定要再隐藏。
-3. 直接点文字修改：店名、期数、品牌、型号、服务项目。字多了会自动缩小。
-4. 导出：文件 → 导出 → 更改文件类型 → PNG → 仅当前幻灯片（1080×1440）。
+2. 换照片：右键照片 →「更改图片」→ 选新照片；或者选中照片按 Delete，再点画框中间的图标插入，会自动裁成画框大小。
+3. 调位置：双击照片 →「裁剪」，拖动照片让表盘居中。可在「开始 → 选择 → 选择窗格」显示「构图参考线」对位，导出前再隐藏。
+4. 直接点文字修改：店名、期数、品牌、型号、服务项目。字多了会自动缩小。
+5. 导出：文件 → 导出 → 更改文件类型 → PNG → 仅当前幻灯片（1080×1440）。
    WPS：文件 → 输出为图片 → 当前页；或 另存为 → PNG。</a:t>
             </a:r>
             <a:endParaRPr lang="en-US" dirty="0"/>
@@ -1074,13 +1072,12 @@
           <a:p>
             <a:r>
               <a:rPr lang="en-US" dirty="0"/>
-              <a:t>模板 C「斜带寄修」使用方法：
+              <a:t>模板 C「维修档案」使用方法：
 1. 左侧缩略图右键这一页 →「复制幻灯片」，在副本上改，原模板留着下次用。
-2. 点表盘位置选中照片 → 右键「更改图片」→ 选新照片。位置不准就用「裁剪」拖动对齐。
-   点不中照片时：开始 → 选择 → 选择窗格，点「手表照片」。
-   对位时可在选择窗格里显示「构图参考线」，导出前一定要再隐藏。
-3. 直接点文字修改：店名、期数、品牌、型号、服务项目。字多了会自动缩小。
-4. 导出：文件 → 导出 → 更改文件类型 → PNG → 仅当前幻灯片（1080×1440）。
+2. 换照片：右键照片 →「更改图片」→ 选新照片；或者选中照片按 Delete，再点画框中间的图标插入，会自动裁成画框大小。
+3. 调位置：双击照片 →「裁剪」，拖动照片让表盘居中。可在「开始 → 选择 → 选择窗格」显示「构图参考线」对位，导出前再隐藏。
+4. 直接点文字修改：店名、期数、品牌、型号、服务项目。字多了会自动缩小。
+5. 导出：文件 → 导出 → 更改文件类型 → PNG → 仅当前幻灯片（1080×1440）。
    WPS：文件 → 输出为图片 → 当前页；或 另存为 → PNG。</a:t>
             </a:r>
             <a:endParaRPr lang="en-US" dirty="0"/>
@@ -1155,12 +1152,19 @@
 
 <file path=ppt/slideLayouts/slideLayout2.xml><?xml version="1.0" encoding="utf-8"?>
 <p:sldLayout xmlns:a="http://schemas.openxmlformats.org/drawingml/2006/main" xmlns:r="http://schemas.openxmlformats.org/officeDocument/2006/relationships" xmlns:p="http://schemas.openxmlformats.org/presentationml/2006/main" preserve="1">
-  <p:cSld name="COVER">
+  <p:cSld name="COVER_NOIR">
     <p:bg>
       <p:bgPr>
-        <a:solidFill>
-          <a:srgbClr val="000000"/>
-        </a:solidFill>
+        <a:blipFill dpi="0" rotWithShape="1">
+          <a:blip r:embed="rId1">
+            <a:lum/>
+          </a:blip>
+          <a:srcRect/>
+          <a:stretch>
+            <a:fillRect/>
+          </a:stretch>
+        </a:blipFill>
+        <a:effectLst/>
       </p:bgPr>
     </p:bg>
     <p:spTree>
@@ -1187,8 +1191,8 @@
         </p:nvSpPr>
         <p:spPr>
           <a:xfrm>
-            <a:off x="0" y="0"/>
-            <a:ext cx="10287000" cy="13716000"/>
+            <a:off x="914400" y="1676400"/>
+            <a:ext cx="8458200" cy="7886700"/>
           </a:xfrm>
           <a:prstGeom prst="rect">
             <a:avLst/>
@@ -1201,7 +1205,7 @@
           <a:lstStyle>
             <a:lvl1pPr indent="0" marL="0">
               <a:buNone/>
-              <a:defRPr lang="en-US" dirty="0"/>
+              <a:defRPr lang="zh-CN" dirty="0"/>
             </a:lvl1pPr>
           </a:lstStyle>
           <a:p>
@@ -1209,14 +1213,14 @@
               <a:buNone/>
             </a:pPr>
             <a:r>
-              <a:rPr lang="en-US" dirty="0">
+              <a:rPr lang="zh-CN" dirty="0">
                 <a:solidFill>
                   <a:srgbClr val="000000"/>
                 </a:solidFill>
               </a:rPr>
               <a:t>点图标插入手表照片</a:t>
             </a:r>
-            <a:endParaRPr lang="en-US" dirty="0"/>
+            <a:endParaRPr lang="zh-CN" dirty="0"/>
           </a:p>
         </p:txBody>
       </p:sp>
@@ -1229,6 +1233,287 @@
 </file>
 
 <file path=ppt/slideLayouts/slideLayout3.xml><?xml version="1.0" encoding="utf-8"?>
+<p:sldLayout xmlns:a="http://schemas.openxmlformats.org/drawingml/2006/main" xmlns:r="http://schemas.openxmlformats.org/officeDocument/2006/relationships" xmlns:p="http://schemas.openxmlformats.org/presentationml/2006/main" preserve="1">
+  <p:cSld name="COVER_IVORY">
+    <p:bg>
+      <p:bgPr>
+        <a:blipFill dpi="0" rotWithShape="1">
+          <a:blip r:embed="rId1">
+            <a:lum/>
+          </a:blip>
+          <a:srcRect/>
+          <a:stretch>
+            <a:fillRect/>
+          </a:stretch>
+        </a:blipFill>
+        <a:effectLst/>
+      </p:bgPr>
+    </p:bg>
+    <p:spTree>
+      <p:nvGrpSpPr>
+        <p:cNvPr id="1" name=""/>
+        <p:cNvGrpSpPr/>
+        <p:nvPr/>
+      </p:nvGrpSpPr>
+      <p:grpSpPr>
+        <a:xfrm>
+          <a:off x="0" y="0"/>
+          <a:ext cx="0" cy="0"/>
+          <a:chOff x="0" y="0"/>
+          <a:chExt cx="0" cy="0"/>
+        </a:xfrm>
+      </p:grpSpPr>
+      <p:sp>
+        <p:nvSpPr>
+          <p:cNvPr id="2" name="Text 0"/>
+          <p:cNvSpPr/>
+          <p:nvPr>
+            <p:ph idx="100" hasCustomPrompt="1"/>
+          </p:nvPr>
+        </p:nvSpPr>
+        <p:spPr>
+          <a:xfrm>
+            <a:off x="609600" y="609600"/>
+            <a:ext cx="9067800" cy="9067800"/>
+          </a:xfrm>
+          <a:prstGeom prst="rect">
+            <a:avLst/>
+          </a:prstGeom>
+          <a:noFill/>
+          <a:ln/>
+        </p:spPr>
+        <p:txBody>
+          <a:bodyPr wrap="square" rtlCol="0"/>
+          <a:lstStyle>
+            <a:lvl1pPr indent="0" marL="0">
+              <a:buNone/>
+              <a:defRPr lang="zh-CN" dirty="0"/>
+            </a:lvl1pPr>
+          </a:lstStyle>
+          <a:p>
+            <a:pPr indent="0" marL="0">
+              <a:buNone/>
+            </a:pPr>
+            <a:r>
+              <a:rPr lang="zh-CN" dirty="0">
+                <a:solidFill>
+                  <a:srgbClr val="000000"/>
+                </a:solidFill>
+              </a:rPr>
+              <a:t>点图标插入手表照片</a:t>
+            </a:r>
+            <a:endParaRPr lang="zh-CN" dirty="0"/>
+          </a:p>
+        </p:txBody>
+      </p:sp>
+    </p:spTree>
+  </p:cSld>
+  <p:clrMapOvr>
+    <a:masterClrMapping/>
+  </p:clrMapOvr>
+</p:sldLayout>
+</file>
+
+<file path=ppt/slideLayouts/slideLayout4.xml><?xml version="1.0" encoding="utf-8"?>
+<p:sldLayout xmlns:a="http://schemas.openxmlformats.org/drawingml/2006/main" xmlns:r="http://schemas.openxmlformats.org/officeDocument/2006/relationships" xmlns:p="http://schemas.openxmlformats.org/presentationml/2006/main" preserve="1">
+  <p:cSld name="COVER_DOSSIER">
+    <p:bg>
+      <p:bgPr>
+        <a:blipFill dpi="0" rotWithShape="1">
+          <a:blip r:embed="rId1">
+            <a:lum/>
+          </a:blip>
+          <a:srcRect/>
+          <a:stretch>
+            <a:fillRect/>
+          </a:stretch>
+        </a:blipFill>
+        <a:effectLst/>
+      </p:bgPr>
+    </p:bg>
+    <p:spTree>
+      <p:nvGrpSpPr>
+        <p:cNvPr id="1" name=""/>
+        <p:cNvGrpSpPr/>
+        <p:nvPr/>
+      </p:nvGrpSpPr>
+      <p:grpSpPr>
+        <a:xfrm>
+          <a:off x="0" y="0"/>
+          <a:ext cx="0" cy="0"/>
+          <a:chOff x="0" y="0"/>
+          <a:chExt cx="0" cy="0"/>
+        </a:xfrm>
+      </p:grpSpPr>
+      <p:sp>
+        <p:nvSpPr>
+          <p:cNvPr id="2" name="Text 0"/>
+          <p:cNvSpPr/>
+          <p:nvPr>
+            <p:ph idx="100" hasCustomPrompt="1"/>
+          </p:nvPr>
+        </p:nvSpPr>
+        <p:spPr>
+          <a:xfrm>
+            <a:off x="685800" y="1524000"/>
+            <a:ext cx="8915400" cy="7696200"/>
+          </a:xfrm>
+          <a:prstGeom prst="rect">
+            <a:avLst/>
+          </a:prstGeom>
+          <a:noFill/>
+          <a:ln/>
+        </p:spPr>
+        <p:txBody>
+          <a:bodyPr wrap="square" rtlCol="0"/>
+          <a:lstStyle>
+            <a:lvl1pPr indent="0" marL="0">
+              <a:buNone/>
+              <a:defRPr lang="zh-CN" dirty="0"/>
+            </a:lvl1pPr>
+          </a:lstStyle>
+          <a:p>
+            <a:pPr indent="0" marL="0">
+              <a:buNone/>
+            </a:pPr>
+            <a:r>
+              <a:rPr lang="zh-CN" dirty="0">
+                <a:solidFill>
+                  <a:srgbClr val="000000"/>
+                </a:solidFill>
+              </a:rPr>
+              <a:t>点图标插入手表照片</a:t>
+            </a:r>
+            <a:endParaRPr lang="zh-CN" dirty="0"/>
+          </a:p>
+        </p:txBody>
+      </p:sp>
+      <p:sp>
+        <p:nvSpPr>
+          <p:cNvPr id="3" name="Text 0"/>
+          <p:cNvSpPr/>
+          <p:nvPr/>
+        </p:nvSpPr>
+        <p:spPr>
+          <a:xfrm>
+            <a:off x="2286000" y="704850"/>
+            <a:ext cx="5715000" cy="419100"/>
+          </a:xfrm>
+          <a:prstGeom prst="rect">
+            <a:avLst/>
+          </a:prstGeom>
+          <a:noFill/>
+          <a:ln/>
+        </p:spPr>
+        <p:txBody>
+          <a:bodyPr wrap="square" lIns="0" tIns="0" rIns="0" bIns="0" rtlCol="0" anchor="ctr"/>
+          <a:lstStyle/>
+          <a:p>
+            <a:pPr algn="ctr" indent="0" marL="0">
+              <a:buNone/>
+            </a:pPr>
+            <a:r>
+              <a:rPr lang="zh-CN" sz="2100" spc="1200" kern="0" dirty="0">
+                <a:solidFill>
+                  <a:srgbClr val="ECE6DA"/>
+                </a:solidFill>
+                <a:latin typeface="Cormorant Garamond SemiBold" pitchFamily="34" charset="0"/>
+                <a:ea typeface="Noto Serif SC" pitchFamily="34" charset="-122"/>
+                <a:cs typeface="Noto Serif SC" pitchFamily="34" charset="-120"/>
+              </a:rPr>
+              <a:t>SERVICE  RECORD</a:t>
+            </a:r>
+            <a:endParaRPr lang="zh-CN" sz="2100" dirty="0"/>
+          </a:p>
+        </p:txBody>
+      </p:sp>
+      <p:sp>
+        <p:nvSpPr>
+          <p:cNvPr id="4" name="Text 1"/>
+          <p:cNvSpPr/>
+          <p:nvPr/>
+        </p:nvSpPr>
+        <p:spPr>
+          <a:xfrm>
+            <a:off x="685800" y="10934700"/>
+            <a:ext cx="2381250" cy="552450"/>
+          </a:xfrm>
+          <a:prstGeom prst="rect">
+            <a:avLst/>
+          </a:prstGeom>
+          <a:noFill/>
+          <a:ln/>
+        </p:spPr>
+        <p:txBody>
+          <a:bodyPr wrap="square" lIns="0" tIns="0" rIns="0" bIns="0" rtlCol="0" anchor="ctr"/>
+          <a:lstStyle/>
+          <a:p>
+            <a:pPr indent="0" marL="0">
+              <a:buNone/>
+            </a:pPr>
+            <a:r>
+              <a:rPr lang="zh-CN" sz="1800" spc="400" kern="0" dirty="0">
+                <a:solidFill>
+                  <a:srgbClr val="B0925F"/>
+                </a:solidFill>
+                <a:latin typeface="Cormorant Garamond SemiBold" pitchFamily="34" charset="0"/>
+                <a:ea typeface="Noto Serif SC" pitchFamily="34" charset="-122"/>
+                <a:cs typeface="Noto Serif SC" pitchFamily="34" charset="-120"/>
+              </a:rPr>
+              <a:t>BRAND  品牌</a:t>
+            </a:r>
+            <a:endParaRPr lang="zh-CN" sz="1800" dirty="0"/>
+          </a:p>
+        </p:txBody>
+      </p:sp>
+      <p:sp>
+        <p:nvSpPr>
+          <p:cNvPr id="5" name="Text 2"/>
+          <p:cNvSpPr/>
+          <p:nvPr/>
+        </p:nvSpPr>
+        <p:spPr>
+          <a:xfrm>
+            <a:off x="685800" y="11525250"/>
+            <a:ext cx="2381250" cy="552450"/>
+          </a:xfrm>
+          <a:prstGeom prst="rect">
+            <a:avLst/>
+          </a:prstGeom>
+          <a:noFill/>
+          <a:ln/>
+        </p:spPr>
+        <p:txBody>
+          <a:bodyPr wrap="square" lIns="0" tIns="0" rIns="0" bIns="0" rtlCol="0" anchor="ctr"/>
+          <a:lstStyle/>
+          <a:p>
+            <a:pPr indent="0" marL="0">
+              <a:buNone/>
+            </a:pPr>
+            <a:r>
+              <a:rPr lang="zh-CN" sz="1800" spc="400" kern="0" dirty="0">
+                <a:solidFill>
+                  <a:srgbClr val="B0925F"/>
+                </a:solidFill>
+                <a:latin typeface="Cormorant Garamond SemiBold" pitchFamily="34" charset="0"/>
+                <a:ea typeface="Noto Serif SC" pitchFamily="34" charset="-122"/>
+                <a:cs typeface="Noto Serif SC" pitchFamily="34" charset="-120"/>
+              </a:rPr>
+              <a:t>SERVICE  项目</a:t>
+            </a:r>
+            <a:endParaRPr lang="zh-CN" sz="1800" dirty="0"/>
+          </a:p>
+        </p:txBody>
+      </p:sp>
+    </p:spTree>
+  </p:cSld>
+  <p:clrMapOvr>
+    <a:masterClrMapping/>
+  </p:clrMapOvr>
+</p:sldLayout>
+</file>
+
+<file path=ppt/slideLayouts/slideLayout5.xml><?xml version="1.0" encoding="utf-8"?>
 <p:sldLayout xmlns:a="http://schemas.openxmlformats.org/drawingml/2006/main" xmlns:r="http://schemas.openxmlformats.org/officeDocument/2006/relationships" xmlns:p="http://schemas.openxmlformats.org/presentationml/2006/main" preserve="1">
   <p:cSld name="GUIDE">
     <p:bg>
@@ -1276,13 +1561,13 @@
           <a:lstStyle>
             <a:lvl1pPr algn="l" indent="0" marL="0">
               <a:buNone/>
-              <a:defRPr lang="en-US" sz="4000" dirty="0">
+              <a:defRPr lang="zh-CN" sz="4000" dirty="0">
                 <a:solidFill>
                   <a:srgbClr val="FFFFFF"/>
                 </a:solidFill>
-                <a:latin typeface="Noto Sans SC Black" pitchFamily="34" charset="0"/>
-                <a:ea typeface="Noto Sans SC Black" pitchFamily="34" charset="-122"/>
-                <a:cs typeface="Noto Sans SC Black" pitchFamily="34" charset="-120"/>
+                <a:latin typeface="Noto Serif SC SemiBold" pitchFamily="34" charset="0"/>
+                <a:ea typeface="Noto Serif SC SemiBold" pitchFamily="34" charset="-122"/>
+                <a:cs typeface="Noto Serif SC SemiBold" pitchFamily="34" charset="-120"/>
               </a:defRPr>
             </a:lvl1pPr>
           </a:lstStyle>
@@ -1290,7 +1575,7 @@
             <a:pPr algn="l" indent="0" marL="0">
               <a:buNone/>
             </a:pPr>
-            <a:endParaRPr lang="en-US" sz="4000" dirty="0"/>
+            <a:endParaRPr lang="zh-CN" sz="4000" dirty="0"/>
           </a:p>
         </p:txBody>
       </p:sp>
@@ -1319,7 +1604,7 @@
               <a:buNone/>
             </a:pPr>
             <a:r>
-              <a:rPr lang="en-US" sz="1100" dirty="0">
+              <a:rPr lang="zh-CN" sz="1100" dirty="0">
                 <a:solidFill>
                   <a:srgbClr val="6E6A64"/>
                 </a:solidFill>
@@ -1329,7 +1614,7 @@
               </a:rPr>
               <a:t>名表维修 · 抖音封面模板</a:t>
             </a:r>
-            <a:endParaRPr lang="en-US" sz="1100" dirty="0"/>
+            <a:endParaRPr lang="zh-CN" sz="1100" dirty="0"/>
           </a:p>
         </p:txBody>
       </p:sp>
@@ -1374,10 +1659,10 @@
           <a:p>
             <a:pPr algn="r"/>
             <a:fld id="{F7021451-1387-4CA6-816F-3879F97B5CBC}" type="slidenum">
-              <a:rPr b="0" lang="en-US"/>
-              <a:t>1003</a:t>
+              <a:rPr b="0" lang="zh-CN"/>
+              <a:t>1005</a:t>
             </a:fld>
-            <a:endParaRPr lang="en-US"/>
+            <a:endParaRPr lang="zh-CN"/>
           </a:p>
         </p:txBody>
       </p:sp>
@@ -1461,6 +1746,8 @@
     <p:sldLayoutId id="2147483649" r:id="rId1"/>
     <p:sldLayoutId id="2147483650" r:id="rId2"/>
     <p:sldLayoutId id="2147483651" r:id="rId3"/>
+    <p:sldLayoutId id="2147483652" r:id="rId4"/>
+    <p:sldLayoutId id="2147483653" r:id="rId5"/>
   </p:sldLayoutIdLst>
   <p:hf sldNum="0" hdr="0" ftr="0" dt="0"/>
   <p:txStyles>
@@ -1764,11 +2051,11 @@
                 <a:solidFill>
                   <a:srgbClr val="FFFFFF"/>
                 </a:solidFill>
-                <a:latin typeface="Noto Sans SC Black" pitchFamily="34" charset="0"/>
-                <a:ea typeface="Noto Sans SC Black" pitchFamily="34" charset="-122"/>
-                <a:cs typeface="Noto Sans SC Black" pitchFamily="34" charset="-120"/>
-              </a:rPr>
-              <a:t>三种封面风格，选一种用到底</a:t>
+                <a:latin typeface="Noto Serif SC SemiBold" pitchFamily="34" charset="0"/>
+                <a:ea typeface="Noto Serif SC SemiBold" pitchFamily="34" charset="-122"/>
+                <a:cs typeface="Noto Serif SC SemiBold" pitchFamily="34" charset="-120"/>
+              </a:rPr>
+              <a:t>三种画框风格，选一种用到底</a:t>
             </a:r>
             <a:endParaRPr lang="zh-CN" sz="4000" dirty="0"/>
           </a:p>
@@ -1807,7 +2094,7 @@
                 <a:ea typeface="Microsoft YaHei" pitchFamily="34" charset="-122"/>
                 <a:cs typeface="Microsoft YaHei" pitchFamily="34" charset="-120"/>
               </a:rPr>
-              <a:t>整个主页统一一种风格、统一拍摄角度，九宫格才整齐。每次只需换照片、改文字，导出就是 1080×1440 的抖音封面。</a:t>
+              <a:t>照片放进画框，文字都在照片外面，不压表。你们用柔光灯把表拍好，套进画框、改几个字就是一张封面。</a:t>
             </a:r>
             <a:endParaRPr lang="zh-CN" sz="1900" dirty="0"/>
           </a:p>
@@ -1815,7 +2102,7 @@
       </p:sp>
       <p:pic>
         <p:nvPicPr>
-          <p:cNvPr id="4" name="风格A预览" descr="封面风格 A「黑金典藏」示例">    </p:cNvPr>
+          <p:cNvPr id="4" name="风格A预览" descr="封面风格 A「暗夜画廊」示例">    </p:cNvPr>
           <p:cNvPicPr>
             <a:picLocks noChangeAspect="1"/>
           </p:cNvPicPr>
@@ -1862,31 +2149,31 @@
               <a:buNone/>
             </a:pPr>
             <a:r>
-              <a:rPr lang="zh-CN" sz="2200" dirty="0">
+              <a:rPr lang="zh-CN" sz="2100" dirty="0">
                 <a:solidFill>
                   <a:srgbClr val="FFFFFF"/>
                 </a:solidFill>
-                <a:latin typeface="Noto Sans SC Black" pitchFamily="34" charset="0"/>
-                <a:ea typeface="Noto Sans SC Black" pitchFamily="34" charset="-122"/>
-                <a:cs typeface="Noto Sans SC Black" pitchFamily="34" charset="-120"/>
-              </a:rPr>
-              <a:t>A  黑金典藏</a:t>
-            </a:r>
-            <a:pPr indent="0" marL="0">
-              <a:buNone/>
-            </a:pPr>
-            <a:r>
-              <a:rPr lang="zh-CN" sz="1600" dirty="0">
-                <a:solidFill>
-                  <a:srgbClr val="D6B36E"/>
-                </a:solidFill>
-                <a:latin typeface="Noto Sans SC Black" pitchFamily="34" charset="0"/>
-                <a:ea typeface="Noto Sans SC Black" pitchFamily="34" charset="-122"/>
-                <a:cs typeface="Noto Sans SC Black" pitchFamily="34" charset="-120"/>
+                <a:latin typeface="Noto Serif SC SemiBold" pitchFamily="34" charset="0"/>
+                <a:ea typeface="Noto Serif SC SemiBold" pitchFamily="34" charset="-122"/>
+                <a:cs typeface="Noto Serif SC SemiBold" pitchFamily="34" charset="-120"/>
+              </a:rPr>
+              <a:t>A  暗夜画廊</a:t>
+            </a:r>
+            <a:pPr indent="0" marL="0">
+              <a:buNone/>
+            </a:pPr>
+            <a:r>
+              <a:rPr lang="zh-CN" sz="1500" dirty="0">
+                <a:solidFill>
+                  <a:srgbClr val="C4A876"/>
+                </a:solidFill>
+                <a:latin typeface="Noto Serif SC SemiBold" pitchFamily="34" charset="0"/>
+                <a:ea typeface="Noto Serif SC SemiBold" pitchFamily="34" charset="-122"/>
+                <a:cs typeface="Noto Serif SC SemiBold" pitchFamily="34" charset="-120"/>
               </a:rPr>
               <a:t>  推荐</a:t>
             </a:r>
-            <a:endParaRPr lang="zh-CN" sz="2200" dirty="0"/>
+            <a:endParaRPr lang="zh-CN" sz="2100" dirty="0"/>
           </a:p>
         </p:txBody>
       </p:sp>
@@ -1923,7 +2210,7 @@
                 <a:ea typeface="Microsoft YaHei" pitchFamily="34" charset="-122"/>
                 <a:cs typeface="Microsoft YaHei" pitchFamily="34" charset="-120"/>
               </a:rPr>
-              <a:t>高级感最强，适合劳力士、百达翡丽这类高端表</a:t>
+              <a:t>黑卡纸配香槟金细线，像画廊里的展品，最稳重</a:t>
             </a:r>
             <a:endParaRPr lang="zh-CN" sz="1400" dirty="0"/>
           </a:p>
@@ -1931,7 +2218,7 @@
       </p:sp>
       <p:pic>
         <p:nvPicPr>
-          <p:cNvPr id="7" name="风格B预览" descr="封面风格 B「工坊硬核」示例">    </p:cNvPr>
+          <p:cNvPr id="7" name="风格B预览" descr="封面风格 B「象牙画册」示例">    </p:cNvPr>
           <p:cNvPicPr>
             <a:picLocks noChangeAspect="1"/>
           </p:cNvPicPr>
@@ -1978,17 +2265,17 @@
               <a:buNone/>
             </a:pPr>
             <a:r>
-              <a:rPr lang="zh-CN" sz="2200" dirty="0">
+              <a:rPr lang="zh-CN" sz="2100" dirty="0">
                 <a:solidFill>
                   <a:srgbClr val="FFFFFF"/>
                 </a:solidFill>
-                <a:latin typeface="Noto Sans SC Black" pitchFamily="34" charset="0"/>
-                <a:ea typeface="Noto Sans SC Black" pitchFamily="34" charset="-122"/>
-                <a:cs typeface="Noto Sans SC Black" pitchFamily="34" charset="-120"/>
-              </a:rPr>
-              <a:t>B  工坊硬核</a:t>
-            </a:r>
-            <a:endParaRPr lang="zh-CN" sz="2200" dirty="0"/>
+                <a:latin typeface="Noto Serif SC SemiBold" pitchFamily="34" charset="0"/>
+                <a:ea typeface="Noto Serif SC SemiBold" pitchFamily="34" charset="-122"/>
+                <a:cs typeface="Noto Serif SC SemiBold" pitchFamily="34" charset="-120"/>
+              </a:rPr>
+              <a:t>B  象牙画册</a:t>
+            </a:r>
+            <a:endParaRPr lang="zh-CN" sz="2100" dirty="0"/>
           </a:p>
         </p:txBody>
       </p:sp>
@@ -2025,7 +2312,7 @@
                 <a:ea typeface="Microsoft YaHei" pitchFamily="34" charset="-122"/>
                 <a:cs typeface="Microsoft YaHei" pitchFamily="34" charset="-120"/>
               </a:rPr>
-              <a:t>延续你们现在的黄字风格，最醒目</a:t>
+              <a:t>米白纸张质感，像拍卖图录，在深色主页里最显眼</a:t>
             </a:r>
             <a:endParaRPr lang="zh-CN" sz="1400" dirty="0"/>
           </a:p>
@@ -2033,7 +2320,7 @@
       </p:sp>
       <p:pic>
         <p:nvPicPr>
-          <p:cNvPr id="10" name="风格C预览" descr="封面风格 C「斜带寄修」示例">    </p:cNvPr>
+          <p:cNvPr id="10" name="风格C预览" descr="封面风格 C「维修档案」示例">    </p:cNvPr>
           <p:cNvPicPr>
             <a:picLocks noChangeAspect="1"/>
           </p:cNvPicPr>
@@ -2080,17 +2367,17 @@
               <a:buNone/>
             </a:pPr>
             <a:r>
-              <a:rPr lang="zh-CN" sz="2200" dirty="0">
+              <a:rPr lang="zh-CN" sz="2100" dirty="0">
                 <a:solidFill>
                   <a:srgbClr val="FFFFFF"/>
                 </a:solidFill>
-                <a:latin typeface="Noto Sans SC Black" pitchFamily="34" charset="0"/>
-                <a:ea typeface="Noto Sans SC Black" pitchFamily="34" charset="-122"/>
-                <a:cs typeface="Noto Sans SC Black" pitchFamily="34" charset="-120"/>
-              </a:rPr>
-              <a:t>C  斜带寄修</a:t>
-            </a:r>
-            <a:endParaRPr lang="zh-CN" sz="2200" dirty="0"/>
+                <a:latin typeface="Noto Serif SC SemiBold" pitchFamily="34" charset="0"/>
+                <a:ea typeface="Noto Serif SC SemiBold" pitchFamily="34" charset="-122"/>
+                <a:cs typeface="Noto Serif SC SemiBold" pitchFamily="34" charset="-120"/>
+              </a:rPr>
+              <a:t>C  维修档案</a:t>
+            </a:r>
+            <a:endParaRPr lang="zh-CN" sz="2100" dirty="0"/>
           </a:p>
         </p:txBody>
       </p:sp>
@@ -2127,7 +2414,7 @@
                 <a:ea typeface="Microsoft YaHei" pitchFamily="34" charset="-122"/>
                 <a:cs typeface="Microsoft YaHei" pitchFamily="34" charset="-120"/>
               </a:rPr>
-              <a:t>参考图里的斜带元素，动感、有辨识度</a:t>
+              <a:t>取景框加维修档案表格，突出专业维修</a:t>
             </a:r>
             <a:endParaRPr lang="zh-CN" sz="1400" dirty="0"/>
           </a:p>
@@ -2162,9 +2449,9 @@
                 <a:solidFill>
                   <a:srgbClr val="FFFFFF"/>
                 </a:solidFill>
-                <a:latin typeface="Noto Sans SC Black" pitchFamily="34" charset="0"/>
-                <a:ea typeface="Noto Sans SC Black" pitchFamily="34" charset="-122"/>
-                <a:cs typeface="Noto Sans SC Black" pitchFamily="34" charset="-120"/>
+                <a:latin typeface="Noto Serif SC SemiBold" pitchFamily="34" charset="0"/>
+                <a:ea typeface="Noto Serif SC SemiBold" pitchFamily="34" charset="-122"/>
+                <a:cs typeface="Noto Serif SC SemiBold" pitchFamily="34" charset="-120"/>
               </a:rPr>
               <a:t>字体都可免费商用</a:t>
             </a:r>
@@ -2219,28 +2506,17 @@
               <a:buNone/>
             </a:pPr>
             <a:r>
-              <a:rPr lang="zh-CN" sz="3000" dirty="0">
-                <a:gradFill flip="none" rotWithShape="1">
-                  <a:gsLst>
-                    <a:gs pos="0">
-                      <a:srgbClr val="FFF3D6"/>
-                    </a:gs>
-                    <a:gs pos="50000">
-                      <a:srgbClr val="E6C47E"/>
-                    </a:gs>
-                    <a:gs pos="100000">
-                      <a:srgbClr val="B38842"/>
-                    </a:gs>
-                  </a:gsLst>
-                  <a:lin ang="5400000" scaled="1"/>
-                </a:gradFill>
-                <a:latin typeface="Noto Serif SC Black" pitchFamily="34" charset="0"/>
-                <a:ea typeface="Noto Serif SC Black" pitchFamily="34" charset="-122"/>
-                <a:cs typeface="Noto Serif SC Black" pitchFamily="34" charset="-120"/>
+              <a:rPr lang="zh-CN" sz="2600" dirty="0">
+                <a:solidFill>
+                  <a:srgbClr val="E8D9B8"/>
+                </a:solidFill>
+                <a:latin typeface="Noto Serif SC SemiBold" pitchFamily="34" charset="0"/>
+                <a:ea typeface="Noto Serif SC SemiBold" pitchFamily="34" charset="-122"/>
+                <a:cs typeface="Noto Serif SC SemiBold" pitchFamily="34" charset="-120"/>
               </a:rPr>
               <a:t>海马150 GMT</a:t>
             </a:r>
-            <a:endParaRPr lang="zh-CN" sz="3000" dirty="0"/>
+            <a:endParaRPr lang="zh-CN" sz="2600" dirty="0"/>
           </a:p>
         </p:txBody>
       </p:sp>
@@ -2269,17 +2545,17 @@
               <a:buNone/>
             </a:pPr>
             <a:r>
-              <a:rPr lang="zh-CN" sz="1700" dirty="0">
+              <a:rPr lang="zh-CN" sz="1600" dirty="0">
                 <a:solidFill>
                   <a:srgbClr val="FFFFFF"/>
                 </a:solidFill>
-                <a:latin typeface="Noto Sans SC Black" pitchFamily="34" charset="0"/>
-                <a:ea typeface="Noto Sans SC Black" pitchFamily="34" charset="-122"/>
-                <a:cs typeface="Noto Sans SC Black" pitchFamily="34" charset="-120"/>
-              </a:rPr>
-              <a:t>思源宋体 Black</a:t>
-            </a:r>
-            <a:endParaRPr lang="zh-CN" sz="1700" dirty="0"/>
+                <a:latin typeface="Noto Serif SC SemiBold" pitchFamily="34" charset="0"/>
+                <a:ea typeface="Noto Serif SC SemiBold" pitchFamily="34" charset="-122"/>
+                <a:cs typeface="Noto Serif SC SemiBold" pitchFamily="34" charset="-120"/>
+              </a:rPr>
+              <a:t>思源宋体 SemiBold</a:t>
+            </a:r>
+            <a:endParaRPr lang="zh-CN" sz="1600" dirty="0"/>
           </a:p>
           <a:p>
             <a:pPr indent="0" marL="0">
@@ -2294,9 +2570,9 @@
                 <a:ea typeface="Microsoft YaHei" pitchFamily="34" charset="-122"/>
                 <a:cs typeface="Microsoft YaHei" pitchFamily="34" charset="-120"/>
               </a:rPr>
-              <a:t>模板 A 标题 · Noto Serif SC · Google / Adobe</a:t>
-            </a:r>
-            <a:endParaRPr lang="zh-CN" sz="1700" dirty="0"/>
+              <a:t>型号大标题 · Noto Serif SC</a:t>
+            </a:r>
+            <a:endParaRPr lang="zh-CN" sz="1600" dirty="0"/>
           </a:p>
         </p:txBody>
       </p:sp>
@@ -2327,7 +2603,7 @@
             <a:r>
               <a:rPr lang="zh-CN" sz="1200" dirty="0">
                 <a:solidFill>
-                  <a:srgbClr val="D6B36E"/>
+                  <a:srgbClr val="C4A876"/>
                 </a:solidFill>
                 <a:latin typeface="Microsoft YaHei" pitchFamily="34" charset="0"/>
                 <a:ea typeface="Microsoft YaHei" pitchFamily="34" charset="-122"/>
@@ -2386,28 +2662,17 @@
               <a:buNone/>
             </a:pPr>
             <a:r>
-              <a:rPr lang="zh-CN" sz="3000" dirty="0">
-                <a:gradFill flip="none" rotWithShape="1">
-                  <a:gsLst>
-                    <a:gs pos="0">
-                      <a:srgbClr val="FFF3D6"/>
-                    </a:gs>
-                    <a:gs pos="50000">
-                      <a:srgbClr val="E6C47E"/>
-                    </a:gs>
-                    <a:gs pos="100000">
-                      <a:srgbClr val="B38842"/>
-                    </a:gs>
-                  </a:gsLst>
-                  <a:lin ang="5400000" scaled="1"/>
-                </a:gradFill>
-                <a:latin typeface="Noto Sans SC Black" pitchFamily="34" charset="0"/>
-                <a:ea typeface="Noto Sans SC Black" pitchFamily="34" charset="-122"/>
-                <a:cs typeface="Noto Sans SC Black" pitchFamily="34" charset="-120"/>
-              </a:rPr>
-              <a:t>海马150 GMT</a:t>
-            </a:r>
-            <a:endParaRPr lang="zh-CN" sz="3000" dirty="0"/>
+              <a:rPr lang="zh-CN" sz="2600" dirty="0">
+                <a:solidFill>
+                  <a:srgbClr val="E8D9B8"/>
+                </a:solidFill>
+                <a:latin typeface="Noto Serif SC" pitchFamily="34" charset="0"/>
+                <a:ea typeface="Noto Serif SC" pitchFamily="34" charset="-122"/>
+                <a:cs typeface="Noto Serif SC" pitchFamily="34" charset="-120"/>
+              </a:rPr>
+              <a:t>洗油大保养 · 外观修复</a:t>
+            </a:r>
+            <a:endParaRPr lang="zh-CN" sz="2600" dirty="0"/>
           </a:p>
         </p:txBody>
       </p:sp>
@@ -2436,17 +2701,17 @@
               <a:buNone/>
             </a:pPr>
             <a:r>
-              <a:rPr lang="zh-CN" sz="1700" dirty="0">
+              <a:rPr lang="zh-CN" sz="1600" dirty="0">
                 <a:solidFill>
                   <a:srgbClr val="FFFFFF"/>
                 </a:solidFill>
-                <a:latin typeface="Noto Sans SC Black" pitchFamily="34" charset="0"/>
-                <a:ea typeface="Noto Sans SC Black" pitchFamily="34" charset="-122"/>
-                <a:cs typeface="Noto Sans SC Black" pitchFamily="34" charset="-120"/>
-              </a:rPr>
-              <a:t>思源黑体 Black</a:t>
-            </a:r>
-            <a:endParaRPr lang="zh-CN" sz="1700" dirty="0"/>
+                <a:latin typeface="Noto Serif SC SemiBold" pitchFamily="34" charset="0"/>
+                <a:ea typeface="Noto Serif SC SemiBold" pitchFamily="34" charset="-122"/>
+                <a:cs typeface="Noto Serif SC SemiBold" pitchFamily="34" charset="-120"/>
+              </a:rPr>
+              <a:t>思源宋体 Regular</a:t>
+            </a:r>
+            <a:endParaRPr lang="zh-CN" sz="1600" dirty="0"/>
           </a:p>
           <a:p>
             <a:pPr indent="0" marL="0">
@@ -2461,9 +2726,9 @@
                 <a:ea typeface="Microsoft YaHei" pitchFamily="34" charset="-122"/>
                 <a:cs typeface="Microsoft YaHei" pitchFamily="34" charset="-120"/>
               </a:rPr>
-              <a:t>模板 B 标题 · Noto Sans SC · Google / Adobe</a:t>
-            </a:r>
-            <a:endParaRPr lang="zh-CN" sz="1700" dirty="0"/>
+              <a:t>服务项目、店名 · Noto Serif SC</a:t>
+            </a:r>
+            <a:endParaRPr lang="zh-CN" sz="1600" dirty="0"/>
           </a:p>
         </p:txBody>
       </p:sp>
@@ -2494,7 +2759,7 @@
             <a:r>
               <a:rPr lang="zh-CN" sz="1200" dirty="0">
                 <a:solidFill>
-                  <a:srgbClr val="D6B36E"/>
+                  <a:srgbClr val="C4A876"/>
                 </a:solidFill>
                 <a:latin typeface="Microsoft YaHei" pitchFamily="34" charset="0"/>
                 <a:ea typeface="Microsoft YaHei" pitchFamily="34" charset="-122"/>
@@ -2553,28 +2818,17 @@
               <a:buNone/>
             </a:pPr>
             <a:r>
-              <a:rPr lang="zh-CN" sz="3000" dirty="0">
-                <a:gradFill flip="none" rotWithShape="1">
-                  <a:gsLst>
-                    <a:gs pos="0">
-                      <a:srgbClr val="FFF3D6"/>
-                    </a:gs>
-                    <a:gs pos="50000">
-                      <a:srgbClr val="E6C47E"/>
-                    </a:gs>
-                    <a:gs pos="100000">
-                      <a:srgbClr val="B38842"/>
-                    </a:gs>
-                  </a:gsLst>
-                  <a:lin ang="5400000" scaled="1"/>
-                </a:gradFill>
-                <a:latin typeface="Smiley Sans Oblique" pitchFamily="34" charset="0"/>
-                <a:ea typeface="Smiley Sans Oblique" pitchFamily="34" charset="-122"/>
-                <a:cs typeface="Smiley Sans Oblique" pitchFamily="34" charset="-120"/>
-              </a:rPr>
-              <a:t>海马150 GMT</a:t>
-            </a:r>
-            <a:endParaRPr lang="zh-CN" sz="3000" dirty="0"/>
+              <a:rPr lang="zh-CN" sz="2600" dirty="0">
+                <a:solidFill>
+                  <a:srgbClr val="E8D9B8"/>
+                </a:solidFill>
+                <a:latin typeface="Cormorant Garamond SemiBold" pitchFamily="34" charset="0"/>
+                <a:ea typeface="Noto Serif SC" pitchFamily="34" charset="-122"/>
+                <a:cs typeface="Noto Serif SC" pitchFamily="34" charset="-120"/>
+              </a:rPr>
+              <a:t>OMEGA · LONGINES</a:t>
+            </a:r>
+            <a:endParaRPr lang="zh-CN" sz="2600" dirty="0"/>
           </a:p>
         </p:txBody>
       </p:sp>
@@ -2603,17 +2857,17 @@
               <a:buNone/>
             </a:pPr>
             <a:r>
-              <a:rPr lang="zh-CN" sz="1700" dirty="0">
+              <a:rPr lang="zh-CN" sz="1600" dirty="0">
                 <a:solidFill>
                   <a:srgbClr val="FFFFFF"/>
                 </a:solidFill>
-                <a:latin typeface="Noto Sans SC Black" pitchFamily="34" charset="0"/>
-                <a:ea typeface="Noto Sans SC Black" pitchFamily="34" charset="-122"/>
-                <a:cs typeface="Noto Sans SC Black" pitchFamily="34" charset="-120"/>
-              </a:rPr>
-              <a:t>得意黑</a:t>
-            </a:r>
-            <a:endParaRPr lang="zh-CN" sz="1700" dirty="0"/>
+                <a:latin typeface="Noto Serif SC SemiBold" pitchFamily="34" charset="0"/>
+                <a:ea typeface="Noto Serif SC SemiBold" pitchFamily="34" charset="-122"/>
+                <a:cs typeface="Noto Serif SC SemiBold" pitchFamily="34" charset="-120"/>
+              </a:rPr>
+              <a:t>Cormorant Garamond</a:t>
+            </a:r>
+            <a:endParaRPr lang="zh-CN" sz="1600" dirty="0"/>
           </a:p>
           <a:p>
             <a:pPr indent="0" marL="0">
@@ -2628,9 +2882,9 @@
                 <a:ea typeface="Microsoft YaHei" pitchFamily="34" charset="-122"/>
                 <a:cs typeface="Microsoft YaHei" pitchFamily="34" charset="-120"/>
               </a:rPr>
-              <a:t>模板 C 标题 · Smiley Sans · 锚坞</a:t>
-            </a:r>
-            <a:endParaRPr lang="zh-CN" sz="1700" dirty="0"/>
+              <a:t>英文品牌名 · Cormorant</a:t>
+            </a:r>
+            <a:endParaRPr lang="zh-CN" sz="1600" dirty="0"/>
           </a:p>
         </p:txBody>
       </p:sp>
@@ -2661,7 +2915,7 @@
             <a:r>
               <a:rPr lang="zh-CN" sz="1200" dirty="0">
                 <a:solidFill>
-                  <a:srgbClr val="D6B36E"/>
+                  <a:srgbClr val="C4A876"/>
                 </a:solidFill>
                 <a:latin typeface="Microsoft YaHei" pitchFamily="34" charset="0"/>
                 <a:ea typeface="Microsoft YaHei" pitchFamily="34" charset="-122"/>
@@ -2720,28 +2974,17 @@
               <a:buNone/>
             </a:pPr>
             <a:r>
-              <a:rPr lang="zh-CN" sz="3000" b="1" dirty="0">
-                <a:gradFill flip="none" rotWithShape="1">
-                  <a:gsLst>
-                    <a:gs pos="0">
-                      <a:srgbClr val="FFF3D6"/>
-                    </a:gs>
-                    <a:gs pos="50000">
-                      <a:srgbClr val="E6C47E"/>
-                    </a:gs>
-                    <a:gs pos="100000">
-                      <a:srgbClr val="B38842"/>
-                    </a:gs>
-                  </a:gsLst>
-                  <a:lin ang="5400000" scaled="1"/>
-                </a:gradFill>
-                <a:latin typeface="Cinzel" pitchFamily="34" charset="0"/>
-                <a:ea typeface="Noto Serif SC Black" pitchFamily="34" charset="-122"/>
-                <a:cs typeface="Cinzel" pitchFamily="34" charset="-120"/>
-              </a:rPr>
-              <a:t>OMEGA · ROLEX</a:t>
-            </a:r>
-            <a:endParaRPr lang="zh-CN" sz="3000" dirty="0"/>
+              <a:rPr lang="zh-CN" sz="2600" i="1" dirty="0">
+                <a:solidFill>
+                  <a:srgbClr val="E8D9B8"/>
+                </a:solidFill>
+                <a:latin typeface="Cormorant Garamond Medium" pitchFamily="34" charset="0"/>
+                <a:ea typeface="Noto Serif SC" pitchFamily="34" charset="-122"/>
+                <a:cs typeface="Noto Serif SC" pitchFamily="34" charset="-120"/>
+              </a:rPr>
+              <a:t>N° 023</a:t>
+            </a:r>
+            <a:endParaRPr lang="zh-CN" sz="2600" dirty="0"/>
           </a:p>
         </p:txBody>
       </p:sp>
@@ -2770,17 +3013,17 @@
               <a:buNone/>
             </a:pPr>
             <a:r>
-              <a:rPr lang="zh-CN" sz="1700" dirty="0">
+              <a:rPr lang="zh-CN" sz="1600" dirty="0">
                 <a:solidFill>
                   <a:srgbClr val="FFFFFF"/>
                 </a:solidFill>
-                <a:latin typeface="Noto Sans SC Black" pitchFamily="34" charset="0"/>
-                <a:ea typeface="Noto Sans SC Black" pitchFamily="34" charset="-122"/>
-                <a:cs typeface="Noto Sans SC Black" pitchFamily="34" charset="-120"/>
-              </a:rPr>
-              <a:t>Cinzel</a:t>
-            </a:r>
-            <a:endParaRPr lang="zh-CN" sz="1700" dirty="0"/>
+                <a:latin typeface="Noto Serif SC SemiBold" pitchFamily="34" charset="0"/>
+                <a:ea typeface="Noto Serif SC SemiBold" pitchFamily="34" charset="-122"/>
+                <a:cs typeface="Noto Serif SC SemiBold" pitchFamily="34" charset="-120"/>
+              </a:rPr>
+              <a:t>Cormorant Garamond Italic</a:t>
+            </a:r>
+            <a:endParaRPr lang="zh-CN" sz="1600" dirty="0"/>
           </a:p>
           <a:p>
             <a:pPr indent="0" marL="0">
@@ -2795,9 +3038,9 @@
                 <a:ea typeface="Microsoft YaHei" pitchFamily="34" charset="-122"/>
                 <a:cs typeface="Microsoft YaHei" pitchFamily="34" charset="-120"/>
               </a:rPr>
-              <a:t>模板 A 英文品牌 · Cinzel · NDISCOVER</a:t>
-            </a:r>
-            <a:endParaRPr lang="zh-CN" sz="1700" dirty="0"/>
+              <a:t>期数编号 · Cormorant</a:t>
+            </a:r>
+            <a:endParaRPr lang="zh-CN" sz="1600" dirty="0"/>
           </a:p>
         </p:txBody>
       </p:sp>
@@ -2828,7 +3071,7 @@
             <a:r>
               <a:rPr lang="zh-CN" sz="1200" dirty="0">
                 <a:solidFill>
-                  <a:srgbClr val="D6B36E"/>
+                  <a:srgbClr val="C4A876"/>
                 </a:solidFill>
                 <a:latin typeface="Microsoft YaHei" pitchFamily="34" charset="0"/>
                 <a:ea typeface="Microsoft YaHei" pitchFamily="34" charset="-122"/>
@@ -2849,7 +3092,7 @@
         <p:spPr>
           <a:xfrm>
             <a:off x="685800" y="12573000"/>
-            <a:ext cx="8915400" cy="548640"/>
+            <a:ext cx="8915400" cy="365760"/>
           </a:xfrm>
           <a:prstGeom prst="rect">
             <a:avLst/>
@@ -2873,7 +3116,7 @@
                 <a:ea typeface="Microsoft YaHei" pitchFamily="34" charset="-122"/>
                 <a:cs typeface="Microsoft YaHei" pitchFamily="34" charset="-120"/>
               </a:rPr>
-              <a:t>字体在 fonts 文件夹，第一次用前先安装。也可换成抖音官方的「抖音美好体」（免费商用）。</a:t>
+              <a:t>字体在 fonts 文件夹，第一次用前先安装。</a:t>
             </a:r>
             <a:endParaRPr lang="zh-CN" sz="1300" dirty="0"/>
           </a:p>
@@ -2983,9 +3226,9 @@
                 <a:solidFill>
                   <a:srgbClr val="FFFFFF"/>
                 </a:solidFill>
-                <a:latin typeface="Noto Sans SC Black" pitchFamily="34" charset="0"/>
-                <a:ea typeface="Noto Sans SC Black" pitchFamily="34" charset="-122"/>
-                <a:cs typeface="Noto Sans SC Black" pitchFamily="34" charset="-120"/>
+                <a:latin typeface="Noto Serif SC SemiBold" pitchFamily="34" charset="0"/>
+                <a:ea typeface="Noto Serif SC SemiBold" pitchFamily="34" charset="-122"/>
+                <a:cs typeface="Noto Serif SC SemiBold" pitchFamily="34" charset="-120"/>
               </a:rPr>
               <a:t>主页效果：统一后的九宫格</a:t>
             </a:r>
@@ -3026,7 +3269,7 @@
                 <a:ea typeface="Microsoft YaHei" pitchFamily="34" charset="-122"/>
                 <a:cs typeface="Microsoft YaHei" pitchFamily="34" charset="-120"/>
               </a:rPr>
-              <a:t>下图用模板 A 套了 9 块表（照片取自你们发来的截图，仅作示意）。</a:t>
+              <a:t>下图用模板 A「暗夜画廊」套了你们的表（照片取自发来的截图，仅作示意）。</a:t>
             </a:r>
             <a:endParaRPr lang="zh-CN" sz="1900" dirty="0"/>
           </a:p>
@@ -3048,8 +3291,8 @@
         </p:blipFill>
         <p:spPr>
           <a:xfrm>
-            <a:off x="685800" y="2514600"/>
-            <a:ext cx="6217920" cy="9445020"/>
+            <a:off x="502920" y="2331720"/>
+            <a:ext cx="6583680" cy="8272272"/>
           </a:xfrm>
           <a:prstGeom prst="rect">
             <a:avLst/>
@@ -3071,7 +3314,7 @@
             <a:avLst/>
           </a:prstGeom>
           <a:solidFill>
-            <a:srgbClr val="D6B36E"/>
+            <a:srgbClr val="C4A876"/>
           </a:solidFill>
           <a:ln/>
         </p:spPr>
@@ -3083,17 +3326,17 @@
               <a:buNone/>
             </a:pPr>
             <a:r>
-              <a:rPr lang="zh-CN" sz="2200" dirty="0">
-                <a:solidFill>
-                  <a:srgbClr val="0B0A09"/>
-                </a:solidFill>
-                <a:latin typeface="Noto Sans SC Black" pitchFamily="34" charset="0"/>
-                <a:ea typeface="Noto Sans SC Black" pitchFamily="34" charset="-122"/>
-                <a:cs typeface="Noto Sans SC Black" pitchFamily="34" charset="-120"/>
+              <a:rPr lang="zh-CN" sz="2000" dirty="0">
+                <a:solidFill>
+                  <a:srgbClr val="111111"/>
+                </a:solidFill>
+                <a:latin typeface="Noto Serif SC SemiBold" pitchFamily="34" charset="0"/>
+                <a:ea typeface="Noto Serif SC SemiBold" pitchFamily="34" charset="-122"/>
+                <a:cs typeface="Noto Serif SC SemiBold" pitchFamily="34" charset="-120"/>
               </a:rPr>
               <a:t>1</a:t>
             </a:r>
-            <a:endParaRPr lang="zh-CN" sz="2200" dirty="0"/>
+            <a:endParaRPr lang="zh-CN" sz="2000" dirty="0"/>
           </a:p>
         </p:txBody>
       </p:sp>
@@ -3126,11 +3369,11 @@
                 <a:solidFill>
                   <a:srgbClr val="FFFFFF"/>
                 </a:solidFill>
-                <a:latin typeface="Noto Sans SC Black" pitchFamily="34" charset="0"/>
-                <a:ea typeface="Noto Sans SC Black" pitchFamily="34" charset="-122"/>
-                <a:cs typeface="Noto Sans SC Black" pitchFamily="34" charset="-120"/>
-              </a:rPr>
-              <a:t>大标题要够大</a:t>
+                <a:latin typeface="Noto Serif SC SemiBold" pitchFamily="34" charset="0"/>
+                <a:ea typeface="Noto Serif SC SemiBold" pitchFamily="34" charset="-122"/>
+                <a:cs typeface="Noto Serif SC SemiBold" pitchFamily="34" charset="-120"/>
+              </a:rPr>
+              <a:t>标题克制</a:t>
             </a:r>
             <a:endParaRPr lang="zh-CN" sz="2000" dirty="0"/>
           </a:p>
@@ -3169,7 +3412,7 @@
                 <a:ea typeface="Microsoft YaHei" pitchFamily="34" charset="-122"/>
                 <a:cs typeface="Microsoft YaHei" pitchFamily="34" charset="-120"/>
               </a:rPr>
-              <a:t>型号或昵称用 2–6 个字，缩略图里也能一眼看清。</a:t>
+              <a:t>型号 2–6 个字，用宋体，不描边、不用亮黄，高级感来自留白。</a:t>
             </a:r>
             <a:endParaRPr lang="zh-CN" sz="1400" dirty="0"/>
           </a:p>
@@ -3190,7 +3433,7 @@
             <a:avLst/>
           </a:prstGeom>
           <a:solidFill>
-            <a:srgbClr val="D6B36E"/>
+            <a:srgbClr val="C4A876"/>
           </a:solidFill>
           <a:ln/>
         </p:spPr>
@@ -3202,17 +3445,17 @@
               <a:buNone/>
             </a:pPr>
             <a:r>
-              <a:rPr lang="zh-CN" sz="2200" dirty="0">
-                <a:solidFill>
-                  <a:srgbClr val="0B0A09"/>
-                </a:solidFill>
-                <a:latin typeface="Noto Sans SC Black" pitchFamily="34" charset="0"/>
-                <a:ea typeface="Noto Sans SC Black" pitchFamily="34" charset="-122"/>
-                <a:cs typeface="Noto Sans SC Black" pitchFamily="34" charset="-120"/>
+              <a:rPr lang="zh-CN" sz="2000" dirty="0">
+                <a:solidFill>
+                  <a:srgbClr val="111111"/>
+                </a:solidFill>
+                <a:latin typeface="Noto Serif SC SemiBold" pitchFamily="34" charset="0"/>
+                <a:ea typeface="Noto Serif SC SemiBold" pitchFamily="34" charset="-122"/>
+                <a:cs typeface="Noto Serif SC SemiBold" pitchFamily="34" charset="-120"/>
               </a:rPr>
               <a:t>2</a:t>
             </a:r>
-            <a:endParaRPr lang="zh-CN" sz="2200" dirty="0"/>
+            <a:endParaRPr lang="zh-CN" sz="2000" dirty="0"/>
           </a:p>
         </p:txBody>
       </p:sp>
@@ -3245,11 +3488,11 @@
                 <a:solidFill>
                   <a:srgbClr val="FFFFFF"/>
                 </a:solidFill>
-                <a:latin typeface="Noto Sans SC Black" pitchFamily="34" charset="0"/>
-                <a:ea typeface="Noto Sans SC Black" pitchFamily="34" charset="-122"/>
-                <a:cs typeface="Noto Sans SC Black" pitchFamily="34" charset="-120"/>
-              </a:rPr>
-              <a:t>避开点赞数</a:t>
+                <a:latin typeface="Noto Serif SC SemiBold" pitchFamily="34" charset="0"/>
+                <a:ea typeface="Noto Serif SC SemiBold" pitchFamily="34" charset="-122"/>
+                <a:cs typeface="Noto Serif SC SemiBold" pitchFamily="34" charset="-120"/>
+              </a:rPr>
+              <a:t>文字不压照片</a:t>
             </a:r>
             <a:endParaRPr lang="zh-CN" sz="2000" dirty="0"/>
           </a:p>
@@ -3288,7 +3531,7 @@
                 <a:ea typeface="Microsoft YaHei" pitchFamily="34" charset="-122"/>
                 <a:cs typeface="Microsoft YaHei" pitchFamily="34" charset="-120"/>
               </a:rPr>
-              <a:t>主页左下角会被点赞数挡住，模板的文字都在它上面。</a:t>
+              <a:t>照片完整干净，品牌、型号、服务都放在画框里。</a:t>
             </a:r>
             <a:endParaRPr lang="zh-CN" sz="1400" dirty="0"/>
           </a:p>
@@ -3309,7 +3552,7 @@
             <a:avLst/>
           </a:prstGeom>
           <a:solidFill>
-            <a:srgbClr val="D6B36E"/>
+            <a:srgbClr val="C4A876"/>
           </a:solidFill>
           <a:ln/>
         </p:spPr>
@@ -3321,17 +3564,17 @@
               <a:buNone/>
             </a:pPr>
             <a:r>
-              <a:rPr lang="zh-CN" sz="2200" dirty="0">
-                <a:solidFill>
-                  <a:srgbClr val="0B0A09"/>
-                </a:solidFill>
-                <a:latin typeface="Noto Sans SC Black" pitchFamily="34" charset="0"/>
-                <a:ea typeface="Noto Sans SC Black" pitchFamily="34" charset="-122"/>
-                <a:cs typeface="Noto Sans SC Black" pitchFamily="34" charset="-120"/>
+              <a:rPr lang="zh-CN" sz="2000" dirty="0">
+                <a:solidFill>
+                  <a:srgbClr val="111111"/>
+                </a:solidFill>
+                <a:latin typeface="Noto Serif SC SemiBold" pitchFamily="34" charset="0"/>
+                <a:ea typeface="Noto Serif SC SemiBold" pitchFamily="34" charset="-122"/>
+                <a:cs typeface="Noto Serif SC SemiBold" pitchFamily="34" charset="-120"/>
               </a:rPr>
               <a:t>3</a:t>
             </a:r>
-            <a:endParaRPr lang="zh-CN" sz="2200" dirty="0"/>
+            <a:endParaRPr lang="zh-CN" sz="2000" dirty="0"/>
           </a:p>
         </p:txBody>
       </p:sp>
@@ -3364,11 +3607,11 @@
                 <a:solidFill>
                   <a:srgbClr val="FFFFFF"/>
                 </a:solidFill>
-                <a:latin typeface="Noto Sans SC Black" pitchFamily="34" charset="0"/>
-                <a:ea typeface="Noto Sans SC Black" pitchFamily="34" charset="-122"/>
-                <a:cs typeface="Noto Sans SC Black" pitchFamily="34" charset="-120"/>
-              </a:rPr>
-              <a:t>角度统一</a:t>
+                <a:latin typeface="Noto Serif SC SemiBold" pitchFamily="34" charset="0"/>
+                <a:ea typeface="Noto Serif SC SemiBold" pitchFamily="34" charset="-122"/>
+                <a:cs typeface="Noto Serif SC SemiBold" pitchFamily="34" charset="-120"/>
+              </a:rPr>
+              <a:t>避开点赞数</a:t>
             </a:r>
             <a:endParaRPr lang="zh-CN" sz="2000" dirty="0"/>
           </a:p>
@@ -3407,7 +3650,7 @@
                 <a:ea typeface="Microsoft YaHei" pitchFamily="34" charset="-122"/>
                 <a:cs typeface="Microsoft YaHei" pitchFamily="34" charset="-120"/>
               </a:rPr>
-              <a:t>每块表同一角度、同一位置拍，主页才整齐。</a:t>
+              <a:t>主页左下角会被点赞数挡住，模板在那里留了空。</a:t>
             </a:r>
             <a:endParaRPr lang="zh-CN" sz="1400" dirty="0"/>
           </a:p>
@@ -3428,7 +3671,7 @@
             <a:avLst/>
           </a:prstGeom>
           <a:solidFill>
-            <a:srgbClr val="D6B36E"/>
+            <a:srgbClr val="C4A876"/>
           </a:solidFill>
           <a:ln/>
         </p:spPr>
@@ -3440,17 +3683,17 @@
               <a:buNone/>
             </a:pPr>
             <a:r>
-              <a:rPr lang="zh-CN" sz="2200" dirty="0">
-                <a:solidFill>
-                  <a:srgbClr val="0B0A09"/>
-                </a:solidFill>
-                <a:latin typeface="Noto Sans SC Black" pitchFamily="34" charset="0"/>
-                <a:ea typeface="Noto Sans SC Black" pitchFamily="34" charset="-122"/>
-                <a:cs typeface="Noto Sans SC Black" pitchFamily="34" charset="-120"/>
+              <a:rPr lang="zh-CN" sz="2000" dirty="0">
+                <a:solidFill>
+                  <a:srgbClr val="111111"/>
+                </a:solidFill>
+                <a:latin typeface="Noto Serif SC SemiBold" pitchFamily="34" charset="0"/>
+                <a:ea typeface="Noto Serif SC SemiBold" pitchFamily="34" charset="-122"/>
+                <a:cs typeface="Noto Serif SC SemiBold" pitchFamily="34" charset="-120"/>
               </a:rPr>
               <a:t>4</a:t>
             </a:r>
-            <a:endParaRPr lang="zh-CN" sz="2200" dirty="0"/>
+            <a:endParaRPr lang="zh-CN" sz="2000" dirty="0"/>
           </a:p>
         </p:txBody>
       </p:sp>
@@ -3483,11 +3726,11 @@
                 <a:solidFill>
                   <a:srgbClr val="FFFFFF"/>
                 </a:solidFill>
-                <a:latin typeface="Noto Sans SC Black" pitchFamily="34" charset="0"/>
-                <a:ea typeface="Noto Sans SC Black" pitchFamily="34" charset="-122"/>
-                <a:cs typeface="Noto Sans SC Black" pitchFamily="34" charset="-120"/>
-              </a:rPr>
-              <a:t>加期数编号</a:t>
+                <a:latin typeface="Noto Serif SC SemiBold" pitchFamily="34" charset="0"/>
+                <a:ea typeface="Noto Serif SC SemiBold" pitchFamily="34" charset="-122"/>
+                <a:cs typeface="Noto Serif SC SemiBold" pitchFamily="34" charset="-120"/>
+              </a:rPr>
+              <a:t>光线角度统一</a:t>
             </a:r>
             <a:endParaRPr lang="zh-CN" sz="2000" dirty="0"/>
           </a:p>
@@ -3526,7 +3769,7 @@
                 <a:ea typeface="Microsoft YaHei" pitchFamily="34" charset="-122"/>
                 <a:cs typeface="Microsoft YaHei" pitchFamily="34" charset="-120"/>
               </a:rPr>
-              <a:t>NO.023 这类编号让主页像一个系列，粉丝愿意往下翻。</a:t>
+              <a:t>每块表同样的柔光、同样的角度，主页才整齐。</a:t>
             </a:r>
             <a:endParaRPr lang="zh-CN" sz="1400" dirty="0"/>
           </a:p>
@@ -3636,9 +3879,9 @@
                 <a:solidFill>
                   <a:srgbClr val="FFFFFF"/>
                 </a:solidFill>
-                <a:latin typeface="Noto Sans SC Black" pitchFamily="34" charset="0"/>
-                <a:ea typeface="Noto Sans SC Black" pitchFamily="34" charset="-122"/>
-                <a:cs typeface="Noto Sans SC Black" pitchFamily="34" charset="-120"/>
+                <a:latin typeface="Noto Serif SC SemiBold" pitchFamily="34" charset="0"/>
+                <a:ea typeface="Noto Serif SC SemiBold" pitchFamily="34" charset="-122"/>
+                <a:cs typeface="Noto Serif SC SemiBold" pitchFamily="34" charset="-120"/>
               </a:rPr>
               <a:t>出一张封面的流程</a:t>
             </a:r>
@@ -3700,7 +3943,7 @@
             <a:avLst/>
           </a:prstGeom>
           <a:solidFill>
-            <a:srgbClr val="D6B36E"/>
+            <a:srgbClr val="C4A876"/>
           </a:solidFill>
           <a:ln/>
         </p:spPr>
@@ -3712,17 +3955,17 @@
               <a:buNone/>
             </a:pPr>
             <a:r>
-              <a:rPr lang="zh-CN" sz="2200" dirty="0">
-                <a:solidFill>
-                  <a:srgbClr val="0B0A09"/>
-                </a:solidFill>
-                <a:latin typeface="Noto Sans SC Black" pitchFamily="34" charset="0"/>
-                <a:ea typeface="Noto Sans SC Black" pitchFamily="34" charset="-122"/>
-                <a:cs typeface="Noto Sans SC Black" pitchFamily="34" charset="-120"/>
+              <a:rPr lang="zh-CN" sz="2000" dirty="0">
+                <a:solidFill>
+                  <a:srgbClr val="111111"/>
+                </a:solidFill>
+                <a:latin typeface="Noto Serif SC SemiBold" pitchFamily="34" charset="0"/>
+                <a:ea typeface="Noto Serif SC SemiBold" pitchFamily="34" charset="-122"/>
+                <a:cs typeface="Noto Serif SC SemiBold" pitchFamily="34" charset="-120"/>
               </a:rPr>
               <a:t>1</a:t>
             </a:r>
-            <a:endParaRPr lang="zh-CN" sz="2200" dirty="0"/>
+            <a:endParaRPr lang="zh-CN" sz="2000" dirty="0"/>
           </a:p>
         </p:txBody>
       </p:sp>
@@ -3755,9 +3998,9 @@
                 <a:solidFill>
                   <a:srgbClr val="FFFFFF"/>
                 </a:solidFill>
-                <a:latin typeface="Noto Sans SC Black" pitchFamily="34" charset="0"/>
-                <a:ea typeface="Noto Sans SC Black" pitchFamily="34" charset="-122"/>
-                <a:cs typeface="Noto Sans SC Black" pitchFamily="34" charset="-120"/>
+                <a:latin typeface="Noto Serif SC SemiBold" pitchFamily="34" charset="0"/>
+                <a:ea typeface="Noto Serif SC SemiBold" pitchFamily="34" charset="-122"/>
+                <a:cs typeface="Noto Serif SC SemiBold" pitchFamily="34" charset="-120"/>
               </a:rPr>
               <a:t>安装字体（只做一次）</a:t>
             </a:r>
@@ -3822,7 +4065,7 @@
             <a:avLst/>
           </a:prstGeom>
           <a:solidFill>
-            <a:srgbClr val="D6B36E"/>
+            <a:srgbClr val="C4A876"/>
           </a:solidFill>
           <a:ln/>
         </p:spPr>
@@ -3834,17 +4077,17 @@
               <a:buNone/>
             </a:pPr>
             <a:r>
-              <a:rPr lang="zh-CN" sz="2200" dirty="0">
-                <a:solidFill>
-                  <a:srgbClr val="0B0A09"/>
-                </a:solidFill>
-                <a:latin typeface="Noto Sans SC Black" pitchFamily="34" charset="0"/>
-                <a:ea typeface="Noto Sans SC Black" pitchFamily="34" charset="-122"/>
-                <a:cs typeface="Noto Sans SC Black" pitchFamily="34" charset="-120"/>
+              <a:rPr lang="zh-CN" sz="2000" dirty="0">
+                <a:solidFill>
+                  <a:srgbClr val="111111"/>
+                </a:solidFill>
+                <a:latin typeface="Noto Serif SC SemiBold" pitchFamily="34" charset="0"/>
+                <a:ea typeface="Noto Serif SC SemiBold" pitchFamily="34" charset="-122"/>
+                <a:cs typeface="Noto Serif SC SemiBold" pitchFamily="34" charset="-120"/>
               </a:rPr>
               <a:t>2</a:t>
             </a:r>
-            <a:endParaRPr lang="zh-CN" sz="2200" dirty="0"/>
+            <a:endParaRPr lang="zh-CN" sz="2000" dirty="0"/>
           </a:p>
         </p:txBody>
       </p:sp>
@@ -3877,9 +4120,9 @@
                 <a:solidFill>
                   <a:srgbClr val="FFFFFF"/>
                 </a:solidFill>
-                <a:latin typeface="Noto Sans SC Black" pitchFamily="34" charset="0"/>
-                <a:ea typeface="Noto Sans SC Black" pitchFamily="34" charset="-122"/>
-                <a:cs typeface="Noto Sans SC Black" pitchFamily="34" charset="-120"/>
+                <a:latin typeface="Noto Serif SC SemiBold" pitchFamily="34" charset="0"/>
+                <a:ea typeface="Noto Serif SC SemiBold" pitchFamily="34" charset="-122"/>
+                <a:cs typeface="Noto Serif SC SemiBold" pitchFamily="34" charset="-120"/>
               </a:rPr>
               <a:t>复制一页模板</a:t>
             </a:r>
@@ -3944,7 +4187,7 @@
             <a:avLst/>
           </a:prstGeom>
           <a:solidFill>
-            <a:srgbClr val="D6B36E"/>
+            <a:srgbClr val="C4A876"/>
           </a:solidFill>
           <a:ln/>
         </p:spPr>
@@ -3956,17 +4199,17 @@
               <a:buNone/>
             </a:pPr>
             <a:r>
-              <a:rPr lang="zh-CN" sz="2200" dirty="0">
-                <a:solidFill>
-                  <a:srgbClr val="0B0A09"/>
-                </a:solidFill>
-                <a:latin typeface="Noto Sans SC Black" pitchFamily="34" charset="0"/>
-                <a:ea typeface="Noto Sans SC Black" pitchFamily="34" charset="-122"/>
-                <a:cs typeface="Noto Sans SC Black" pitchFamily="34" charset="-120"/>
+              <a:rPr lang="zh-CN" sz="2000" dirty="0">
+                <a:solidFill>
+                  <a:srgbClr val="111111"/>
+                </a:solidFill>
+                <a:latin typeface="Noto Serif SC SemiBold" pitchFamily="34" charset="0"/>
+                <a:ea typeface="Noto Serif SC SemiBold" pitchFamily="34" charset="-122"/>
+                <a:cs typeface="Noto Serif SC SemiBold" pitchFamily="34" charset="-120"/>
               </a:rPr>
               <a:t>3</a:t>
             </a:r>
-            <a:endParaRPr lang="zh-CN" sz="2200" dirty="0"/>
+            <a:endParaRPr lang="zh-CN" sz="2000" dirty="0"/>
           </a:p>
         </p:txBody>
       </p:sp>
@@ -3999,9 +4242,9 @@
                 <a:solidFill>
                   <a:srgbClr val="FFFFFF"/>
                 </a:solidFill>
-                <a:latin typeface="Noto Sans SC Black" pitchFamily="34" charset="0"/>
-                <a:ea typeface="Noto Sans SC Black" pitchFamily="34" charset="-122"/>
-                <a:cs typeface="Noto Sans SC Black" pitchFamily="34" charset="-120"/>
+                <a:latin typeface="Noto Serif SC SemiBold" pitchFamily="34" charset="0"/>
+                <a:ea typeface="Noto Serif SC SemiBold" pitchFamily="34" charset="-122"/>
+                <a:cs typeface="Noto Serif SC SemiBold" pitchFamily="34" charset="-120"/>
               </a:rPr>
               <a:t>换手表照片</a:t>
             </a:r>
@@ -4045,7 +4288,7 @@
                 <a:ea typeface="Microsoft YaHei" pitchFamily="34" charset="-122"/>
                 <a:cs typeface="Microsoft YaHei" pitchFamily="34" charset="-120"/>
               </a:rPr>
-              <a:t>点表盘位置选中照片 → 右键「更改图片」→ 选新照片。位置不准用「图片格式 → 裁剪」拖动对齐。点不中照片时：开始 → 选择 → 选择窗格，点「手表照片」。</a:t>
+              <a:t>右键照片 →「更改图片」→ 选新照片。或者选中照片按 Delete，再点画框中间的图标插入，会自动裁成画框大小。</a:t>
             </a:r>
             <a:endParaRPr lang="zh-CN" sz="1500" dirty="0"/>
           </a:p>
@@ -4066,7 +4309,7 @@
             <a:avLst/>
           </a:prstGeom>
           <a:solidFill>
-            <a:srgbClr val="D6B36E"/>
+            <a:srgbClr val="C4A876"/>
           </a:solidFill>
           <a:ln/>
         </p:spPr>
@@ -4078,17 +4321,17 @@
               <a:buNone/>
             </a:pPr>
             <a:r>
-              <a:rPr lang="zh-CN" sz="2200" dirty="0">
-                <a:solidFill>
-                  <a:srgbClr val="0B0A09"/>
-                </a:solidFill>
-                <a:latin typeface="Noto Sans SC Black" pitchFamily="34" charset="0"/>
-                <a:ea typeface="Noto Sans SC Black" pitchFamily="34" charset="-122"/>
-                <a:cs typeface="Noto Sans SC Black" pitchFamily="34" charset="-120"/>
+              <a:rPr lang="zh-CN" sz="2000" dirty="0">
+                <a:solidFill>
+                  <a:srgbClr val="111111"/>
+                </a:solidFill>
+                <a:latin typeface="Noto Serif SC SemiBold" pitchFamily="34" charset="0"/>
+                <a:ea typeface="Noto Serif SC SemiBold" pitchFamily="34" charset="-122"/>
+                <a:cs typeface="Noto Serif SC SemiBold" pitchFamily="34" charset="-120"/>
               </a:rPr>
               <a:t>4</a:t>
             </a:r>
-            <a:endParaRPr lang="zh-CN" sz="2200" dirty="0"/>
+            <a:endParaRPr lang="zh-CN" sz="2000" dirty="0"/>
           </a:p>
         </p:txBody>
       </p:sp>
@@ -4121,11 +4364,11 @@
                 <a:solidFill>
                   <a:srgbClr val="FFFFFF"/>
                 </a:solidFill>
-                <a:latin typeface="Noto Sans SC Black" pitchFamily="34" charset="0"/>
-                <a:ea typeface="Noto Sans SC Black" pitchFamily="34" charset="-122"/>
-                <a:cs typeface="Noto Sans SC Black" pitchFamily="34" charset="-120"/>
-              </a:rPr>
-              <a:t>对位置（可选）</a:t>
+                <a:latin typeface="Noto Serif SC SemiBold" pitchFamily="34" charset="0"/>
+                <a:ea typeface="Noto Serif SC SemiBold" pitchFamily="34" charset="-122"/>
+                <a:cs typeface="Noto Serif SC SemiBold" pitchFamily="34" charset="-120"/>
+              </a:rPr>
+              <a:t>调位置</a:t>
             </a:r>
             <a:endParaRPr lang="zh-CN" sz="2200" dirty="0"/>
           </a:p>
@@ -4167,7 +4410,7 @@
                 <a:ea typeface="Microsoft YaHei" pitchFamily="34" charset="-122"/>
                 <a:cs typeface="Microsoft YaHei" pitchFamily="34" charset="-120"/>
               </a:rPr>
-              <a:t>在选择窗格里点亮「构图参考线」，把表盘对进圆圈；对好后一定再把它隐藏，否则会被导出。</a:t>
+              <a:t>双击照片 →「裁剪」，拖动照片让表盘居中。可在选择窗格里显示「构图参考线」对位，对好后一定再隐藏，否则会被导出。</a:t>
             </a:r>
             <a:endParaRPr lang="zh-CN" sz="1500" dirty="0"/>
           </a:p>
@@ -4188,7 +4431,7 @@
             <a:avLst/>
           </a:prstGeom>
           <a:solidFill>
-            <a:srgbClr val="D6B36E"/>
+            <a:srgbClr val="C4A876"/>
           </a:solidFill>
           <a:ln/>
         </p:spPr>
@@ -4200,17 +4443,17 @@
               <a:buNone/>
             </a:pPr>
             <a:r>
-              <a:rPr lang="zh-CN" sz="2200" dirty="0">
-                <a:solidFill>
-                  <a:srgbClr val="0B0A09"/>
-                </a:solidFill>
-                <a:latin typeface="Noto Sans SC Black" pitchFamily="34" charset="0"/>
-                <a:ea typeface="Noto Sans SC Black" pitchFamily="34" charset="-122"/>
-                <a:cs typeface="Noto Sans SC Black" pitchFamily="34" charset="-120"/>
+              <a:rPr lang="zh-CN" sz="2000" dirty="0">
+                <a:solidFill>
+                  <a:srgbClr val="111111"/>
+                </a:solidFill>
+                <a:latin typeface="Noto Serif SC SemiBold" pitchFamily="34" charset="0"/>
+                <a:ea typeface="Noto Serif SC SemiBold" pitchFamily="34" charset="-122"/>
+                <a:cs typeface="Noto Serif SC SemiBold" pitchFamily="34" charset="-120"/>
               </a:rPr>
               <a:t>5</a:t>
             </a:r>
-            <a:endParaRPr lang="zh-CN" sz="2200" dirty="0"/>
+            <a:endParaRPr lang="zh-CN" sz="2000" dirty="0"/>
           </a:p>
         </p:txBody>
       </p:sp>
@@ -4243,9 +4486,9 @@
                 <a:solidFill>
                   <a:srgbClr val="FFFFFF"/>
                 </a:solidFill>
-                <a:latin typeface="Noto Sans SC Black" pitchFamily="34" charset="0"/>
-                <a:ea typeface="Noto Sans SC Black" pitchFamily="34" charset="-122"/>
-                <a:cs typeface="Noto Sans SC Black" pitchFamily="34" charset="-120"/>
+                <a:latin typeface="Noto Serif SC SemiBold" pitchFamily="34" charset="0"/>
+                <a:ea typeface="Noto Serif SC SemiBold" pitchFamily="34" charset="-122"/>
+                <a:cs typeface="Noto Serif SC SemiBold" pitchFamily="34" charset="-120"/>
               </a:rPr>
               <a:t>改文字</a:t>
             </a:r>
@@ -4289,7 +4532,7 @@
                 <a:ea typeface="Microsoft YaHei" pitchFamily="34" charset="-122"/>
                 <a:cs typeface="Microsoft YaHei" pitchFamily="34" charset="-120"/>
               </a:rPr>
-              <a:t>点文字直接改店名、期数、品牌、型号、服务项目；型号 2–8 个字最好。</a:t>
+              <a:t>点文字直接改店名、期数、品牌、型号、服务项目；型号 2–6 个字最好看。</a:t>
             </a:r>
             <a:endParaRPr lang="zh-CN" sz="1500" dirty="0"/>
           </a:p>
@@ -4310,7 +4553,7 @@
             <a:avLst/>
           </a:prstGeom>
           <a:solidFill>
-            <a:srgbClr val="D6B36E"/>
+            <a:srgbClr val="C4A876"/>
           </a:solidFill>
           <a:ln/>
         </p:spPr>
@@ -4322,17 +4565,17 @@
               <a:buNone/>
             </a:pPr>
             <a:r>
-              <a:rPr lang="zh-CN" sz="2200" dirty="0">
-                <a:solidFill>
-                  <a:srgbClr val="0B0A09"/>
-                </a:solidFill>
-                <a:latin typeface="Noto Sans SC Black" pitchFamily="34" charset="0"/>
-                <a:ea typeface="Noto Sans SC Black" pitchFamily="34" charset="-122"/>
-                <a:cs typeface="Noto Sans SC Black" pitchFamily="34" charset="-120"/>
+              <a:rPr lang="zh-CN" sz="2000" dirty="0">
+                <a:solidFill>
+                  <a:srgbClr val="111111"/>
+                </a:solidFill>
+                <a:latin typeface="Noto Serif SC SemiBold" pitchFamily="34" charset="0"/>
+                <a:ea typeface="Noto Serif SC SemiBold" pitchFamily="34" charset="-122"/>
+                <a:cs typeface="Noto Serif SC SemiBold" pitchFamily="34" charset="-120"/>
               </a:rPr>
               <a:t>6</a:t>
             </a:r>
-            <a:endParaRPr lang="zh-CN" sz="2200" dirty="0"/>
+            <a:endParaRPr lang="zh-CN" sz="2000" dirty="0"/>
           </a:p>
         </p:txBody>
       </p:sp>
@@ -4365,9 +4608,9 @@
                 <a:solidFill>
                   <a:srgbClr val="FFFFFF"/>
                 </a:solidFill>
-                <a:latin typeface="Noto Sans SC Black" pitchFamily="34" charset="0"/>
-                <a:ea typeface="Noto Sans SC Black" pitchFamily="34" charset="-122"/>
-                <a:cs typeface="Noto Sans SC Black" pitchFamily="34" charset="-120"/>
+                <a:latin typeface="Noto Serif SC SemiBold" pitchFamily="34" charset="0"/>
+                <a:ea typeface="Noto Serif SC SemiBold" pitchFamily="34" charset="-122"/>
+                <a:cs typeface="Noto Serif SC SemiBold" pitchFamily="34" charset="-120"/>
               </a:rPr>
               <a:t>导出图片</a:t>
             </a:r>
@@ -4452,7 +4695,7 @@
             <a:avLst/>
           </a:prstGeom>
           <a:solidFill>
-            <a:srgbClr val="D6B36E"/>
+            <a:srgbClr val="C4A876"/>
           </a:solidFill>
           <a:ln/>
         </p:spPr>
@@ -4464,17 +4707,17 @@
               <a:buNone/>
             </a:pPr>
             <a:r>
-              <a:rPr lang="zh-CN" sz="2200" dirty="0">
-                <a:solidFill>
-                  <a:srgbClr val="0B0A09"/>
-                </a:solidFill>
-                <a:latin typeface="Noto Sans SC Black" pitchFamily="34" charset="0"/>
-                <a:ea typeface="Noto Sans SC Black" pitchFamily="34" charset="-122"/>
-                <a:cs typeface="Noto Sans SC Black" pitchFamily="34" charset="-120"/>
+              <a:rPr lang="zh-CN" sz="2000" dirty="0">
+                <a:solidFill>
+                  <a:srgbClr val="111111"/>
+                </a:solidFill>
+                <a:latin typeface="Noto Serif SC SemiBold" pitchFamily="34" charset="0"/>
+                <a:ea typeface="Noto Serif SC SemiBold" pitchFamily="34" charset="-122"/>
+                <a:cs typeface="Noto Serif SC SemiBold" pitchFamily="34" charset="-120"/>
               </a:rPr>
               <a:t>7</a:t>
             </a:r>
-            <a:endParaRPr lang="zh-CN" sz="2200" dirty="0"/>
+            <a:endParaRPr lang="zh-CN" sz="2000" dirty="0"/>
           </a:p>
         </p:txBody>
       </p:sp>
@@ -4507,9 +4750,9 @@
                 <a:solidFill>
                   <a:srgbClr val="FFFFFF"/>
                 </a:solidFill>
-                <a:latin typeface="Noto Sans SC Black" pitchFamily="34" charset="0"/>
-                <a:ea typeface="Noto Sans SC Black" pitchFamily="34" charset="-122"/>
-                <a:cs typeface="Noto Sans SC Black" pitchFamily="34" charset="-120"/>
+                <a:latin typeface="Noto Serif SC SemiBold" pitchFamily="34" charset="0"/>
+                <a:ea typeface="Noto Serif SC SemiBold" pitchFamily="34" charset="-122"/>
+                <a:cs typeface="Noto Serif SC SemiBold" pitchFamily="34" charset="-120"/>
               </a:rPr>
               <a:t>发抖音时设为封面</a:t>
             </a:r>
@@ -4663,11 +4906,11 @@
                 <a:solidFill>
                   <a:srgbClr val="FFFFFF"/>
                 </a:solidFill>
-                <a:latin typeface="Noto Sans SC Black" pitchFamily="34" charset="0"/>
-                <a:ea typeface="Noto Sans SC Black" pitchFamily="34" charset="-122"/>
-                <a:cs typeface="Noto Sans SC Black" pitchFamily="34" charset="-120"/>
-              </a:rPr>
-              <a:t>拍摄规范：以后都按这个角度拍</a:t>
+                <a:latin typeface="Noto Serif SC SemiBold" pitchFamily="34" charset="0"/>
+                <a:ea typeface="Noto Serif SC SemiBold" pitchFamily="34" charset="-122"/>
+                <a:cs typeface="Noto Serif SC SemiBold" pitchFamily="34" charset="-120"/>
+              </a:rPr>
+              <a:t>拍摄建议：柔光 + 统一角度</a:t>
             </a:r>
             <a:endParaRPr lang="zh-CN" sz="4000" dirty="0"/>
           </a:p>
@@ -4706,7 +4949,7 @@
                 <a:ea typeface="Microsoft YaHei" pitchFamily="34" charset="-122"/>
                 <a:cs typeface="Microsoft YaHei" pitchFamily="34" charset="-120"/>
               </a:rPr>
-              <a:t>在你们现在的拍法（黑背景、表立起来、侧转露出表冠）基础上定成标准，每块表都一样。</a:t>
+              <a:t>画框接近正方形，手机竖拍的照片上下会被裁掉一些。表放正中、四周留空，套进去就刚好。</a:t>
             </a:r>
             <a:endParaRPr lang="zh-CN" sz="1900" dirty="0"/>
           </a:p>
@@ -4714,7 +4957,7 @@
       </p:sp>
       <p:pic>
         <p:nvPicPr>
-          <p:cNvPr id="4" name="构图示意" descr="标准构图：表盘在青色圆圈内，虚线以下为文字区">    </p:cNvPr>
+          <p:cNvPr id="4" name="裁切示意" descr="手机竖拍照片套进画框时，上下会被裁掉">    </p:cNvPr>
           <p:cNvPicPr>
             <a:picLocks noChangeAspect="1"/>
           </p:cNvPicPr>
@@ -4738,46 +4981,7 @@
       </p:pic>
       <p:sp>
         <p:nvSpPr>
-          <p:cNvPr id="5" name="Text 2"/>
-          <p:cNvSpPr txBox="1"/>
-          <p:nvPr/>
-        </p:nvSpPr>
-        <p:spPr>
-          <a:xfrm>
-            <a:off x="685800" y="8183880"/>
-            <a:ext cx="4206240" cy="548640"/>
-          </a:xfrm>
-          <a:prstGeom prst="rect">
-            <a:avLst/>
-          </a:prstGeom>
-          <a:noFill/>
-          <a:ln/>
-        </p:spPr>
-        <p:txBody>
-          <a:bodyPr wrap="square" lIns="0" tIns="0" rIns="0" bIns="0" rtlCol="0" anchor="t"/>
-          <a:lstStyle/>
-          <a:p>
-            <a:pPr indent="0" marL="0">
-              <a:buNone/>
-            </a:pPr>
-            <a:r>
-              <a:rPr lang="zh-CN" sz="1200" dirty="0">
-                <a:solidFill>
-                  <a:srgbClr val="A7A39B"/>
-                </a:solidFill>
-                <a:latin typeface="Microsoft YaHei" pitchFamily="34" charset="0"/>
-                <a:ea typeface="Microsoft YaHei" pitchFamily="34" charset="-122"/>
-                <a:cs typeface="Microsoft YaHei" pitchFamily="34" charset="-120"/>
-              </a:rPr>
-              <a:t>青色圆圈 = 表盘位置；虚线以下 = 文字区；红色 = 会被抖音界面挡住</a:t>
-            </a:r>
-            <a:endParaRPr lang="zh-CN" sz="1200" dirty="0"/>
-          </a:p>
-        </p:txBody>
-      </p:sp>
-      <p:sp>
-        <p:nvSpPr>
-          <p:cNvPr id="6" name="Shape 3"/>
+          <p:cNvPr id="5" name="Shape 2"/>
           <p:cNvSpPr/>
           <p:nvPr/>
         </p:nvSpPr>
@@ -4799,7 +5003,7 @@
       </p:sp>
       <p:pic>
         <p:nvPicPr>
-          <p:cNvPr id="7" name="俯视图" descr="俯视图：表盘向左转约 25 度，手机正对表头">    </p:cNvPr>
+          <p:cNvPr id="6" name="俯视图" descr="俯视图：表盘向左转约 25 度，手机正对表头">    </p:cNvPr>
           <p:cNvPicPr>
             <a:picLocks noChangeAspect="1"/>
           </p:cNvPicPr>
@@ -4823,7 +5027,7 @@
       </p:pic>
       <p:sp>
         <p:nvSpPr>
-          <p:cNvPr id="8" name="Shape 4"/>
+          <p:cNvPr id="7" name="Shape 3"/>
           <p:cNvSpPr/>
           <p:nvPr/>
         </p:nvSpPr>
@@ -4845,7 +5049,7 @@
       </p:sp>
       <p:pic>
         <p:nvPicPr>
-          <p:cNvPr id="9" name="侧视图" descr="侧视图：镜头略高于表盘中心 5 到 10 度，距离 20 到 30 厘米">    </p:cNvPr>
+          <p:cNvPr id="8" name="侧视图" descr="侧视图：柔光灯在左上方，镜头略高于表盘中心">    </p:cNvPr>
           <p:cNvPicPr>
             <a:picLocks noChangeAspect="1"/>
           </p:cNvPicPr>
@@ -4869,7 +5073,7 @@
       </p:pic>
       <p:sp>
         <p:nvSpPr>
-          <p:cNvPr id="10" name="Text 5"/>
+          <p:cNvPr id="9" name="Text 4"/>
           <p:cNvSpPr txBox="1"/>
           <p:nvPr/>
         </p:nvSpPr>
@@ -4894,13 +5098,13 @@
             <a:r>
               <a:rPr lang="zh-CN" sz="1800" dirty="0">
                 <a:solidFill>
-                  <a:srgbClr val="D6B36E"/>
-                </a:solidFill>
-                <a:latin typeface="Noto Sans SC Black" pitchFamily="34" charset="0"/>
-                <a:ea typeface="Noto Sans SC Black" pitchFamily="34" charset="-122"/>
-                <a:cs typeface="Noto Sans SC Black" pitchFamily="34" charset="-120"/>
-              </a:rPr>
-              <a:t>背景</a:t>
+                  <a:srgbClr val="C4A876"/>
+                </a:solidFill>
+                <a:latin typeface="Noto Serif SC SemiBold" pitchFamily="34" charset="0"/>
+                <a:ea typeface="Noto Serif SC SemiBold" pitchFamily="34" charset="-122"/>
+                <a:cs typeface="Noto Serif SC SemiBold" pitchFamily="34" charset="-120"/>
+              </a:rPr>
+              <a:t>光线</a:t>
             </a:r>
             <a:endParaRPr lang="zh-CN" sz="1800" dirty="0"/>
           </a:p>
@@ -4908,7 +5112,7 @@
       </p:sp>
       <p:sp>
         <p:nvSpPr>
-          <p:cNvPr id="11" name="Text 6"/>
+          <p:cNvPr id="10" name="Text 5"/>
           <p:cNvSpPr txBox="1"/>
           <p:nvPr/>
         </p:nvSpPr>
@@ -4933,13 +5137,13 @@
             <a:r>
               <a:rPr lang="zh-CN" sz="1350" dirty="0">
                 <a:solidFill>
-                  <a:srgbClr val="F6F1E7"/>
+                  <a:srgbClr val="F2EEE6"/>
                 </a:solidFill>
                 <a:latin typeface="Microsoft YaHei" pitchFamily="34" charset="0"/>
                 <a:ea typeface="Microsoft YaHei" pitchFamily="34" charset="-122"/>
                 <a:cs typeface="Microsoft YaHei" pitchFamily="34" charset="-120"/>
               </a:rPr>
-              <a:t>黑色植绒布（吸光布），表离背景 30 cm 以上，背景才够黑。</a:t>
+              <a:t>一盏柔光灯（带柔光箱）从左上 45° 打，右侧放白卡给表壳补一道高光，关掉顶灯防反光。</a:t>
             </a:r>
             <a:endParaRPr lang="zh-CN" sz="1350" dirty="0"/>
           </a:p>
@@ -4947,7 +5151,7 @@
       </p:sp>
       <p:sp>
         <p:nvSpPr>
-          <p:cNvPr id="12" name="Text 7"/>
+          <p:cNvPr id="11" name="Text 6"/>
           <p:cNvSpPr txBox="1"/>
           <p:nvPr/>
         </p:nvSpPr>
@@ -4972,13 +5176,13 @@
             <a:r>
               <a:rPr lang="zh-CN" sz="1800" dirty="0">
                 <a:solidFill>
-                  <a:srgbClr val="D6B36E"/>
-                </a:solidFill>
-                <a:latin typeface="Noto Sans SC Black" pitchFamily="34" charset="0"/>
-                <a:ea typeface="Noto Sans SC Black" pitchFamily="34" charset="-122"/>
-                <a:cs typeface="Noto Sans SC Black" pitchFamily="34" charset="-120"/>
-              </a:rPr>
-              <a:t>摆放</a:t>
+                  <a:srgbClr val="C4A876"/>
+                </a:solidFill>
+                <a:latin typeface="Noto Serif SC SemiBold" pitchFamily="34" charset="0"/>
+                <a:ea typeface="Noto Serif SC SemiBold" pitchFamily="34" charset="-122"/>
+                <a:cs typeface="Noto Serif SC SemiBold" pitchFamily="34" charset="-120"/>
+              </a:rPr>
+              <a:t>背景</a:t>
             </a:r>
             <a:endParaRPr lang="zh-CN" sz="1800" dirty="0"/>
           </a:p>
@@ -4986,7 +5190,7 @@
       </p:sp>
       <p:sp>
         <p:nvSpPr>
-          <p:cNvPr id="13" name="Text 8"/>
+          <p:cNvPr id="12" name="Text 7"/>
           <p:cNvSpPr txBox="1"/>
           <p:nvPr/>
         </p:nvSpPr>
@@ -5011,13 +5215,13 @@
             <a:r>
               <a:rPr lang="zh-CN" sz="1350" dirty="0">
                 <a:solidFill>
-                  <a:srgbClr val="F6F1E7"/>
+                  <a:srgbClr val="F2EEE6"/>
                 </a:solidFill>
                 <a:latin typeface="Microsoft YaHei" pitchFamily="34" charset="0"/>
                 <a:ea typeface="Microsoft YaHei" pitchFamily="34" charset="-122"/>
                 <a:cs typeface="Microsoft YaHei" pitchFamily="34" charset="-120"/>
               </a:rPr>
-              <a:t>表立在表枕或支架上，表盘正面朝镜头。</a:t>
+              <a:t>黑色或深灰植绒布，表离背景 30 cm 以上，背景才干净。</a:t>
             </a:r>
             <a:endParaRPr lang="zh-CN" sz="1350" dirty="0"/>
           </a:p>
@@ -5025,7 +5229,7 @@
       </p:sp>
       <p:sp>
         <p:nvSpPr>
-          <p:cNvPr id="14" name="Text 9"/>
+          <p:cNvPr id="13" name="Text 8"/>
           <p:cNvSpPr txBox="1"/>
           <p:nvPr/>
         </p:nvSpPr>
@@ -5050,11 +5254,11 @@
             <a:r>
               <a:rPr lang="zh-CN" sz="1800" dirty="0">
                 <a:solidFill>
-                  <a:srgbClr val="D6B36E"/>
-                </a:solidFill>
-                <a:latin typeface="Noto Sans SC Black" pitchFamily="34" charset="0"/>
-                <a:ea typeface="Noto Sans SC Black" pitchFamily="34" charset="-122"/>
-                <a:cs typeface="Noto Sans SC Black" pitchFamily="34" charset="-120"/>
+                  <a:srgbClr val="C4A876"/>
+                </a:solidFill>
+                <a:latin typeface="Noto Serif SC SemiBold" pitchFamily="34" charset="0"/>
+                <a:ea typeface="Noto Serif SC SemiBold" pitchFamily="34" charset="-122"/>
+                <a:cs typeface="Noto Serif SC SemiBold" pitchFamily="34" charset="-120"/>
               </a:rPr>
               <a:t>角度</a:t>
             </a:r>
@@ -5064,7 +5268,7 @@
       </p:sp>
       <p:sp>
         <p:nvSpPr>
-          <p:cNvPr id="15" name="Text 10"/>
+          <p:cNvPr id="14" name="Text 9"/>
           <p:cNvSpPr txBox="1"/>
           <p:nvPr/>
         </p:nvSpPr>
@@ -5089,13 +5293,13 @@
             <a:r>
               <a:rPr lang="zh-CN" sz="1350" dirty="0">
                 <a:solidFill>
-                  <a:srgbClr val="F6F1E7"/>
+                  <a:srgbClr val="F2EEE6"/>
                 </a:solidFill>
                 <a:latin typeface="Microsoft YaHei" pitchFamily="34" charset="0"/>
                 <a:ea typeface="Microsoft YaHei" pitchFamily="34" charset="-122"/>
                 <a:cs typeface="Microsoft YaHei" pitchFamily="34" charset="-120"/>
               </a:rPr>
-              <a:t>表盘向左转约 25°，露出右侧表冠和表壳侧面。</a:t>
+              <a:t>表立在表枕上，表盘向左转约 25°，露出右侧表冠。</a:t>
             </a:r>
             <a:endParaRPr lang="zh-CN" sz="1350" dirty="0"/>
           </a:p>
@@ -5103,7 +5307,7 @@
       </p:sp>
       <p:sp>
         <p:nvSpPr>
-          <p:cNvPr id="16" name="Text 11"/>
+          <p:cNvPr id="15" name="Text 10"/>
           <p:cNvSpPr txBox="1"/>
           <p:nvPr/>
         </p:nvSpPr>
@@ -5128,11 +5332,11 @@
             <a:r>
               <a:rPr lang="zh-CN" sz="1800" dirty="0">
                 <a:solidFill>
-                  <a:srgbClr val="D6B36E"/>
-                </a:solidFill>
-                <a:latin typeface="Noto Sans SC Black" pitchFamily="34" charset="0"/>
-                <a:ea typeface="Noto Sans SC Black" pitchFamily="34" charset="-122"/>
-                <a:cs typeface="Noto Sans SC Black" pitchFamily="34" charset="-120"/>
+                  <a:srgbClr val="C4A876"/>
+                </a:solidFill>
+                <a:latin typeface="Noto Serif SC SemiBold" pitchFamily="34" charset="0"/>
+                <a:ea typeface="Noto Serif SC SemiBold" pitchFamily="34" charset="-122"/>
+                <a:cs typeface="Noto Serif SC SemiBold" pitchFamily="34" charset="-120"/>
               </a:rPr>
               <a:t>高度</a:t>
             </a:r>
@@ -5142,7 +5346,7 @@
       </p:sp>
       <p:sp>
         <p:nvSpPr>
-          <p:cNvPr id="17" name="Text 12"/>
+          <p:cNvPr id="16" name="Text 11"/>
           <p:cNvSpPr txBox="1"/>
           <p:nvPr/>
         </p:nvSpPr>
@@ -5167,7 +5371,7 @@
             <a:r>
               <a:rPr lang="zh-CN" sz="1350" dirty="0">
                 <a:solidFill>
-                  <a:srgbClr val="F6F1E7"/>
+                  <a:srgbClr val="F2EEE6"/>
                 </a:solidFill>
                 <a:latin typeface="Microsoft YaHei" pitchFamily="34" charset="0"/>
                 <a:ea typeface="Microsoft YaHei" pitchFamily="34" charset="-122"/>
@@ -5181,7 +5385,7 @@
       </p:sp>
       <p:sp>
         <p:nvSpPr>
-          <p:cNvPr id="18" name="Text 13"/>
+          <p:cNvPr id="17" name="Text 12"/>
           <p:cNvSpPr txBox="1"/>
           <p:nvPr/>
         </p:nvSpPr>
@@ -5206,11 +5410,11 @@
             <a:r>
               <a:rPr lang="zh-CN" sz="1800" dirty="0">
                 <a:solidFill>
-                  <a:srgbClr val="D6B36E"/>
-                </a:solidFill>
-                <a:latin typeface="Noto Sans SC Black" pitchFamily="34" charset="0"/>
-                <a:ea typeface="Noto Sans SC Black" pitchFamily="34" charset="-122"/>
-                <a:cs typeface="Noto Sans SC Black" pitchFamily="34" charset="-120"/>
+                  <a:srgbClr val="C4A876"/>
+                </a:solidFill>
+                <a:latin typeface="Noto Serif SC SemiBold" pitchFamily="34" charset="0"/>
+                <a:ea typeface="Noto Serif SC SemiBold" pitchFamily="34" charset="-122"/>
+                <a:cs typeface="Noto Serif SC SemiBold" pitchFamily="34" charset="-120"/>
               </a:rPr>
               <a:t>构图</a:t>
             </a:r>
@@ -5220,7 +5424,7 @@
       </p:sp>
       <p:sp>
         <p:nvSpPr>
-          <p:cNvPr id="19" name="Text 14"/>
+          <p:cNvPr id="18" name="Text 13"/>
           <p:cNvSpPr txBox="1"/>
           <p:nvPr/>
         </p:nvSpPr>
@@ -5245,13 +5449,13 @@
             <a:r>
               <a:rPr lang="zh-CN" sz="1350" dirty="0">
                 <a:solidFill>
-                  <a:srgbClr val="F6F1E7"/>
+                  <a:srgbClr val="F2EEE6"/>
                 </a:solidFill>
                 <a:latin typeface="Microsoft YaHei" pitchFamily="34" charset="0"/>
                 <a:ea typeface="Microsoft YaHei" pitchFamily="34" charset="-122"/>
                 <a:cs typeface="Microsoft YaHei" pitchFamily="34" charset="-120"/>
               </a:rPr>
-              <a:t>手机竖拍 3:4，表盘在画面上半部、约占宽度一半，下半部留给文字。</a:t>
+              <a:t>手机竖拍 3:4，表盘放正中，约占画面宽度六成，上下多留空。</a:t>
             </a:r>
             <a:endParaRPr lang="zh-CN" sz="1350" dirty="0"/>
           </a:p>
@@ -5259,7 +5463,7 @@
       </p:sp>
       <p:sp>
         <p:nvSpPr>
-          <p:cNvPr id="20" name="Text 15"/>
+          <p:cNvPr id="19" name="Text 14"/>
           <p:cNvSpPr txBox="1"/>
           <p:nvPr/>
         </p:nvSpPr>
@@ -5284,11 +5488,11 @@
             <a:r>
               <a:rPr lang="zh-CN" sz="1800" dirty="0">
                 <a:solidFill>
-                  <a:srgbClr val="D6B36E"/>
-                </a:solidFill>
-                <a:latin typeface="Noto Sans SC Black" pitchFamily="34" charset="0"/>
-                <a:ea typeface="Noto Sans SC Black" pitchFamily="34" charset="-122"/>
-                <a:cs typeface="Noto Sans SC Black" pitchFamily="34" charset="-120"/>
+                  <a:srgbClr val="C4A876"/>
+                </a:solidFill>
+                <a:latin typeface="Noto Serif SC SemiBold" pitchFamily="34" charset="0"/>
+                <a:ea typeface="Noto Serif SC SemiBold" pitchFamily="34" charset="-122"/>
+                <a:cs typeface="Noto Serif SC SemiBold" pitchFamily="34" charset="-120"/>
               </a:rPr>
               <a:t>镜头</a:t>
             </a:r>
@@ -5298,7 +5502,7 @@
       </p:sp>
       <p:sp>
         <p:nvSpPr>
-          <p:cNvPr id="21" name="Text 16"/>
+          <p:cNvPr id="20" name="Text 15"/>
           <p:cNvSpPr txBox="1"/>
           <p:nvPr/>
         </p:nvSpPr>
@@ -5323,7 +5527,7 @@
             <a:r>
               <a:rPr lang="zh-CN" sz="1350" dirty="0">
                 <a:solidFill>
-                  <a:srgbClr val="F6F1E7"/>
+                  <a:srgbClr val="F2EEE6"/>
                 </a:solidFill>
                 <a:latin typeface="Microsoft YaHei" pitchFamily="34" charset="0"/>
                 <a:ea typeface="Microsoft YaHei" pitchFamily="34" charset="-122"/>
@@ -5337,7 +5541,7 @@
       </p:sp>
       <p:sp>
         <p:nvSpPr>
-          <p:cNvPr id="22" name="Text 17"/>
+          <p:cNvPr id="21" name="Text 16"/>
           <p:cNvSpPr txBox="1"/>
           <p:nvPr/>
         </p:nvSpPr>
@@ -5362,13 +5566,13 @@
             <a:r>
               <a:rPr lang="zh-CN" sz="1800" dirty="0">
                 <a:solidFill>
-                  <a:srgbClr val="D6B36E"/>
-                </a:solidFill>
-                <a:latin typeface="Noto Sans SC Black" pitchFamily="34" charset="0"/>
-                <a:ea typeface="Noto Sans SC Black" pitchFamily="34" charset="-122"/>
-                <a:cs typeface="Noto Sans SC Black" pitchFamily="34" charset="-120"/>
-              </a:rPr>
-              <a:t>光线</a:t>
+                  <a:srgbClr val="C4A876"/>
+                </a:solidFill>
+                <a:latin typeface="Noto Serif SC SemiBold" pitchFamily="34" charset="0"/>
+                <a:ea typeface="Noto Serif SC SemiBold" pitchFamily="34" charset="-122"/>
+                <a:cs typeface="Noto Serif SC SemiBold" pitchFamily="34" charset="-120"/>
+              </a:rPr>
+              <a:t>细节</a:t>
             </a:r>
             <a:endParaRPr lang="zh-CN" sz="1800" dirty="0"/>
           </a:p>
@@ -5376,7 +5580,7 @@
       </p:sp>
       <p:sp>
         <p:nvSpPr>
-          <p:cNvPr id="23" name="Text 18"/>
+          <p:cNvPr id="22" name="Text 17"/>
           <p:cNvSpPr txBox="1"/>
           <p:nvPr/>
         </p:nvSpPr>
@@ -5401,13 +5605,13 @@
             <a:r>
               <a:rPr lang="zh-CN" sz="1350" dirty="0">
                 <a:solidFill>
-                  <a:srgbClr val="F6F1E7"/>
+                  <a:srgbClr val="F2EEE6"/>
                 </a:solidFill>
                 <a:latin typeface="Microsoft YaHei" pitchFamily="34" charset="0"/>
                 <a:ea typeface="Microsoft YaHei" pitchFamily="34" charset="-122"/>
                 <a:cs typeface="Microsoft YaHei" pitchFamily="34" charset="-120"/>
               </a:rPr>
-              <a:t>一盏柔光灯从左上 45° 打光，右侧放白卡或灯条给表壳边缘补高光，关掉顶灯防反光。</a:t>
+              <a:t>表镜擦干净、指针调到 10:10、点表盘对焦，曝光略降让背景更黑。</a:t>
             </a:r>
             <a:endParaRPr lang="zh-CN" sz="1350" dirty="0"/>
           </a:p>
@@ -5415,7 +5619,7 @@
       </p:sp>
       <p:sp>
         <p:nvSpPr>
-          <p:cNvPr id="24" name="Text 19"/>
+          <p:cNvPr id="23" name="Text 18"/>
           <p:cNvSpPr txBox="1"/>
           <p:nvPr/>
         </p:nvSpPr>
@@ -5440,13 +5644,13 @@
             <a:r>
               <a:rPr lang="zh-CN" sz="1800" dirty="0">
                 <a:solidFill>
-                  <a:srgbClr val="D6B36E"/>
-                </a:solidFill>
-                <a:latin typeface="Noto Sans SC Black" pitchFamily="34" charset="0"/>
-                <a:ea typeface="Noto Sans SC Black" pitchFamily="34" charset="-122"/>
-                <a:cs typeface="Noto Sans SC Black" pitchFamily="34" charset="-120"/>
-              </a:rPr>
-              <a:t>细节</a:t>
+                  <a:srgbClr val="C4A876"/>
+                </a:solidFill>
+                <a:latin typeface="Noto Serif SC SemiBold" pitchFamily="34" charset="0"/>
+                <a:ea typeface="Noto Serif SC SemiBold" pitchFamily="34" charset="-122"/>
+                <a:cs typeface="Noto Serif SC SemiBold" pitchFamily="34" charset="-120"/>
+              </a:rPr>
+              <a:t>统一</a:t>
             </a:r>
             <a:endParaRPr lang="zh-CN" sz="1800" dirty="0"/>
           </a:p>
@@ -5454,7 +5658,7 @@
       </p:sp>
       <p:sp>
         <p:nvSpPr>
-          <p:cNvPr id="25" name="Text 20"/>
+          <p:cNvPr id="24" name="Text 19"/>
           <p:cNvSpPr txBox="1"/>
           <p:nvPr/>
         </p:nvSpPr>
@@ -5479,13 +5683,13 @@
             <a:r>
               <a:rPr lang="zh-CN" sz="1350" dirty="0">
                 <a:solidFill>
-                  <a:srgbClr val="F6F1E7"/>
+                  <a:srgbClr val="F2EEE6"/>
                 </a:solidFill>
                 <a:latin typeface="Microsoft YaHei" pitchFamily="34" charset="0"/>
                 <a:ea typeface="Microsoft YaHei" pitchFamily="34" charset="-122"/>
                 <a:cs typeface="Microsoft YaHei" pitchFamily="34" charset="-120"/>
               </a:rPr>
-              <a:t>表镜擦干净、指针调到 10:10、点表盘对焦，曝光略降让背景纯黑。</a:t>
+              <a:t>每块表同一套灯位和角度，九宫格才整齐。</a:t>
             </a:r>
             <a:endParaRPr lang="zh-CN" sz="1350" dirty="0"/>
           </a:p>
@@ -5582,8 +5786,8 @@
         </p:blipFill>
         <p:spPr>
           <a:xfrm>
-            <a:off x="0" y="0"/>
-            <a:ext cx="10287000" cy="13716000"/>
+            <a:off x="914400" y="1676400"/>
+            <a:ext cx="8458200" cy="7886700"/>
           </a:xfrm>
           <a:prstGeom prst="rect">
             <a:avLst/>
@@ -5592,7 +5796,7 @@
       </p:pic>
       <p:pic>
         <p:nvPicPr>
-          <p:cNvPr id="3" name="遮罩（勿删）">    </p:cNvPr>
+          <p:cNvPr id="3" name="构图参考线（导出前隐藏）" hidden="1" descr="构图参考线">    </p:cNvPr>
           <p:cNvPicPr>
             <a:picLocks noChangeAspect="1"/>
           </p:cNvPicPr>
@@ -5606,133 +5810,30 @@
         </p:blipFill>
         <p:spPr>
           <a:xfrm>
-            <a:off x="0" y="0"/>
-            <a:ext cx="10287000" cy="3238500"/>
+            <a:off x="914400" y="1676400"/>
+            <a:ext cx="8458200" cy="7886700"/>
           </a:xfrm>
           <a:prstGeom prst="rect">
             <a:avLst/>
           </a:prstGeom>
         </p:spPr>
       </p:pic>
-      <p:pic>
-        <p:nvPicPr>
-          <p:cNvPr id="4" name="遮罩（勿删）">    </p:cNvPr>
-          <p:cNvPicPr>
-            <a:picLocks noChangeAspect="1"/>
-          </p:cNvPicPr>
-          <p:nvPr/>
-        </p:nvPicPr>
-        <p:blipFill>
-          <a:blip r:embed="rId3"/>
-          <a:stretch>
-            <a:fillRect/>
-          </a:stretch>
-        </p:blipFill>
-        <p:spPr>
-          <a:xfrm>
-            <a:off x="0" y="3238500"/>
-            <a:ext cx="2857500" cy="4000500"/>
-          </a:xfrm>
-          <a:prstGeom prst="rect">
-            <a:avLst/>
-          </a:prstGeom>
-        </p:spPr>
-      </p:pic>
-      <p:pic>
-        <p:nvPicPr>
-          <p:cNvPr id="5" name="遮罩（勿删）">    </p:cNvPr>
-          <p:cNvPicPr>
-            <a:picLocks noChangeAspect="1"/>
-          </p:cNvPicPr>
-          <p:nvPr/>
-        </p:nvPicPr>
-        <p:blipFill>
-          <a:blip r:embed="rId4"/>
-          <a:stretch>
-            <a:fillRect/>
-          </a:stretch>
-        </p:blipFill>
-        <p:spPr>
-          <a:xfrm>
-            <a:off x="7429500" y="3238500"/>
-            <a:ext cx="2857500" cy="4000500"/>
-          </a:xfrm>
-          <a:prstGeom prst="rect">
-            <a:avLst/>
-          </a:prstGeom>
-        </p:spPr>
-      </p:pic>
-      <p:pic>
-        <p:nvPicPr>
-          <p:cNvPr id="6" name="遮罩（勿删）">    </p:cNvPr>
-          <p:cNvPicPr>
-            <a:picLocks noChangeAspect="1"/>
-          </p:cNvPicPr>
-          <p:nvPr/>
-        </p:nvPicPr>
-        <p:blipFill>
-          <a:blip r:embed="rId5"/>
-          <a:stretch>
-            <a:fillRect/>
-          </a:stretch>
-        </p:blipFill>
-        <p:spPr>
-          <a:xfrm>
-            <a:off x="0" y="7239000"/>
-            <a:ext cx="10287000" cy="6477000"/>
-          </a:xfrm>
-          <a:prstGeom prst="rect">
-            <a:avLst/>
-          </a:prstGeom>
-        </p:spPr>
-      </p:pic>
-      <p:pic>
-        <p:nvPicPr>
-          <p:cNvPr id="7" name="构图参考线（导出前隐藏）" hidden="1">    </p:cNvPr>
-          <p:cNvPicPr>
-            <a:picLocks noChangeAspect="1"/>
-          </p:cNvPicPr>
-          <p:nvPr/>
-        </p:nvPicPr>
-        <p:blipFill>
-          <a:blip r:embed="rId6"/>
-          <a:stretch>
-            <a:fillRect/>
-          </a:stretch>
-        </p:blipFill>
-        <p:spPr>
-          <a:xfrm>
-            <a:off x="0" y="0"/>
-            <a:ext cx="10287000" cy="13716000"/>
-          </a:xfrm>
-          <a:prstGeom prst="rect">
-            <a:avLst/>
-          </a:prstGeom>
-        </p:spPr>
-      </p:pic>
-      <p:sp>
-        <p:nvSpPr>
-          <p:cNvPr id="8" name="店名"/>
-          <p:cNvSpPr txBox="1"/>
-          <p:nvPr/>
-        </p:nvSpPr>
-        <p:spPr>
-          <a:xfrm>
-            <a:off x="2762250" y="495300"/>
-            <a:ext cx="4762500" cy="571500"/>
-          </a:xfrm>
-          <a:prstGeom prst="rect">
-            <a:avLst/>
-          </a:prstGeom>
-          <a:noFill/>
-          <a:ln/>
-          <a:effectLst>
-            <a:outerShdw sx="100000" sy="100000" kx="0" ky="0" algn="bl" rotWithShape="0" blurRad="76200" dist="25400" dir="5400000">
-              <a:srgbClr val="000000">
-                <a:alpha val="65000"/>
-              </a:srgbClr>
-            </a:outerShdw>
-          </a:effectLst>
+      <p:sp>
+        <p:nvSpPr>
+          <p:cNvPr id="4" name="店名（英文）"/>
+          <p:cNvSpPr txBox="1"/>
+          <p:nvPr/>
+        </p:nvSpPr>
+        <p:spPr>
+          <a:xfrm>
+            <a:off x="2286000" y="723900"/>
+            <a:ext cx="5715000" cy="342900"/>
+          </a:xfrm>
+          <a:prstGeom prst="rect">
+            <a:avLst/>
+          </a:prstGeom>
+          <a:noFill/>
+          <a:ln/>
         </p:spPr>
         <p:txBody>
           <a:bodyPr wrap="square" lIns="0" tIns="0" rIns="0" bIns="0" rtlCol="0" anchor="ctr"/>
@@ -5742,89 +5843,75 @@
               <a:buNone/>
             </a:pPr>
             <a:r>
-              <a:rPr lang="zh-CN" sz="2550" spc="200" kern="0" dirty="0">
-                <a:solidFill>
-                  <a:srgbClr val="F6F1E7"/>
-                </a:solidFill>
-                <a:latin typeface="Noto Serif SC Black" pitchFamily="34" charset="0"/>
-                <a:ea typeface="Noto Serif SC Black" pitchFamily="34" charset="-122"/>
-                <a:cs typeface="Noto Serif SC Black" pitchFamily="34" charset="-120"/>
-              </a:rPr>
-              <a:t>XX名表维修</a:t>
-            </a:r>
-            <a:endParaRPr lang="zh-CN" sz="2550" dirty="0"/>
-          </a:p>
-        </p:txBody>
-      </p:sp>
-      <p:sp>
-        <p:nvSpPr>
-          <p:cNvPr id="9" name="期数"/>
-          <p:cNvSpPr txBox="1"/>
-          <p:nvPr/>
-        </p:nvSpPr>
-        <p:spPr>
-          <a:xfrm>
-            <a:off x="7581900" y="476250"/>
-            <a:ext cx="2095500" cy="609600"/>
-          </a:xfrm>
-          <a:prstGeom prst="rect">
-            <a:avLst/>
-          </a:prstGeom>
-          <a:noFill/>
-          <a:ln/>
-          <a:effectLst>
-            <a:outerShdw sx="100000" sy="100000" kx="0" ky="0" algn="bl" rotWithShape="0" blurRad="76200" dist="25400" dir="5400000">
-              <a:srgbClr val="000000">
-                <a:alpha val="65000"/>
-              </a:srgbClr>
-            </a:outerShdw>
-          </a:effectLst>
+              <a:rPr lang="zh-CN" sz="1950" spc="700" kern="0" dirty="0">
+                <a:solidFill>
+                  <a:srgbClr val="C4A876"/>
+                </a:solidFill>
+                <a:latin typeface="Cormorant Garamond SemiBold" pitchFamily="34" charset="0"/>
+                <a:ea typeface="Noto Serif SC" pitchFamily="34" charset="-122"/>
+                <a:cs typeface="Noto Serif SC" pitchFamily="34" charset="-120"/>
+              </a:rPr>
+              <a:t>WATCH SERVICE ATELIER</a:t>
+            </a:r>
+            <a:endParaRPr lang="zh-CN" sz="1950" dirty="0"/>
+          </a:p>
+        </p:txBody>
+      </p:sp>
+      <p:sp>
+        <p:nvSpPr>
+          <p:cNvPr id="5" name="店名"/>
+          <p:cNvSpPr txBox="1"/>
+          <p:nvPr/>
+        </p:nvSpPr>
+        <p:spPr>
+          <a:xfrm>
+            <a:off x="2286000" y="1104900"/>
+            <a:ext cx="5715000" cy="304800"/>
+          </a:xfrm>
+          <a:prstGeom prst="rect">
+            <a:avLst/>
+          </a:prstGeom>
+          <a:noFill/>
+          <a:ln/>
         </p:spPr>
         <p:txBody>
           <a:bodyPr wrap="square" lIns="0" tIns="0" rIns="0" bIns="0" rtlCol="0" anchor="ctr"/>
           <a:lstStyle/>
           <a:p>
-            <a:pPr algn="r" indent="0" marL="0">
-              <a:buNone/>
-            </a:pPr>
-            <a:r>
-              <a:rPr lang="zh-CN" sz="3300" b="1" dirty="0">
-                <a:solidFill>
-                  <a:srgbClr val="D6B36E"/>
-                </a:solidFill>
-                <a:latin typeface="Cinzel" pitchFamily="34" charset="0"/>
-                <a:ea typeface="Noto Serif SC Black" pitchFamily="34" charset="-122"/>
-                <a:cs typeface="Cinzel" pitchFamily="34" charset="-120"/>
-              </a:rPr>
-              <a:t>NO.023</a:t>
-            </a:r>
-            <a:endParaRPr lang="zh-CN" sz="3300" dirty="0"/>
-          </a:p>
-        </p:txBody>
-      </p:sp>
-      <p:sp>
-        <p:nvSpPr>
-          <p:cNvPr id="10" name="品牌"/>
-          <p:cNvSpPr txBox="1"/>
-          <p:nvPr/>
-        </p:nvSpPr>
-        <p:spPr>
-          <a:xfrm>
-            <a:off x="571500" y="8343900"/>
-            <a:ext cx="9144000" cy="685800"/>
-          </a:xfrm>
-          <a:prstGeom prst="rect">
-            <a:avLst/>
-          </a:prstGeom>
-          <a:noFill/>
-          <a:ln/>
-          <a:effectLst>
-            <a:outerShdw sx="100000" sy="100000" kx="0" ky="0" algn="bl" rotWithShape="0" blurRad="101600" dist="38100" dir="5400000">
-              <a:srgbClr val="000000">
-                <a:alpha val="65000"/>
-              </a:srgbClr>
-            </a:outerShdw>
-          </a:effectLst>
+            <a:pPr algn="ctr" indent="0" marL="0">
+              <a:buNone/>
+            </a:pPr>
+            <a:r>
+              <a:rPr lang="zh-CN" sz="1650" spc="600" kern="0" dirty="0">
+                <a:solidFill>
+                  <a:srgbClr val="8F877B"/>
+                </a:solidFill>
+                <a:latin typeface="Noto Serif SC" pitchFamily="34" charset="0"/>
+                <a:ea typeface="Noto Serif SC" pitchFamily="34" charset="-122"/>
+                <a:cs typeface="Noto Serif SC" pitchFamily="34" charset="-120"/>
+              </a:rPr>
+              <a:t>名表维修工作室</a:t>
+            </a:r>
+            <a:endParaRPr lang="zh-CN" sz="1650" dirty="0"/>
+          </a:p>
+        </p:txBody>
+      </p:sp>
+      <p:sp>
+        <p:nvSpPr>
+          <p:cNvPr id="6" name="品牌"/>
+          <p:cNvSpPr txBox="1"/>
+          <p:nvPr/>
+        </p:nvSpPr>
+        <p:spPr>
+          <a:xfrm>
+            <a:off x="1333500" y="9925050"/>
+            <a:ext cx="7620000" cy="476250"/>
+          </a:xfrm>
+          <a:prstGeom prst="rect">
+            <a:avLst/>
+          </a:prstGeom>
+          <a:noFill/>
+          <a:ln/>
         </p:spPr>
         <p:txBody>
           <a:bodyPr wrap="square" lIns="0" tIns="0" rIns="0" bIns="0" rtlCol="0" anchor="ctr">
@@ -5836,43 +5923,36 @@
               <a:buNone/>
             </a:pPr>
             <a:r>
-              <a:rPr lang="zh-CN" sz="3300" b="1" spc="600" kern="0" dirty="0">
-                <a:solidFill>
-                  <a:srgbClr val="D6B36E"/>
-                </a:solidFill>
-                <a:latin typeface="Cinzel" pitchFamily="34" charset="0"/>
-                <a:ea typeface="Noto Serif SC Black" pitchFamily="34" charset="-122"/>
-                <a:cs typeface="Cinzel" pitchFamily="34" charset="-120"/>
-              </a:rPr>
-              <a:t>OMEGA · 欧米茄</a:t>
-            </a:r>
-            <a:endParaRPr lang="zh-CN" sz="3300" dirty="0"/>
-          </a:p>
-        </p:txBody>
-      </p:sp>
-      <p:sp>
-        <p:nvSpPr>
-          <p:cNvPr id="11" name="主标题（型号）"/>
-          <p:cNvSpPr txBox="1"/>
-          <p:nvPr/>
-        </p:nvSpPr>
-        <p:spPr>
-          <a:xfrm>
-            <a:off x="285750" y="9029700"/>
-            <a:ext cx="9715500" cy="2095500"/>
-          </a:xfrm>
-          <a:prstGeom prst="rect">
-            <a:avLst/>
-          </a:prstGeom>
-          <a:noFill/>
-          <a:ln/>
-          <a:effectLst>
-            <a:outerShdw sx="100000" sy="100000" kx="0" ky="0" algn="bl" rotWithShape="0" blurRad="177800" dist="63500" dir="5400000">
-              <a:srgbClr val="000000">
-                <a:alpha val="75000"/>
-              </a:srgbClr>
-            </a:outerShdw>
-          </a:effectLst>
+              <a:rPr lang="zh-CN" sz="2850" spc="1000" kern="0" dirty="0">
+                <a:solidFill>
+                  <a:srgbClr val="C4A876"/>
+                </a:solidFill>
+                <a:latin typeface="Cormorant Garamond SemiBold" pitchFamily="34" charset="0"/>
+                <a:ea typeface="Noto Serif SC" pitchFamily="34" charset="-122"/>
+                <a:cs typeface="Noto Serif SC" pitchFamily="34" charset="-120"/>
+              </a:rPr>
+              <a:t>OMEGA</a:t>
+            </a:r>
+            <a:endParaRPr lang="zh-CN" sz="2850" dirty="0"/>
+          </a:p>
+        </p:txBody>
+      </p:sp>
+      <p:sp>
+        <p:nvSpPr>
+          <p:cNvPr id="7" name="主标题（型号）"/>
+          <p:cNvSpPr txBox="1"/>
+          <p:nvPr/>
+        </p:nvSpPr>
+        <p:spPr>
+          <a:xfrm>
+            <a:off x="762000" y="10401300"/>
+            <a:ext cx="8763000" cy="1181100"/>
+          </a:xfrm>
+          <a:prstGeom prst="rect">
+            <a:avLst/>
+          </a:prstGeom>
+          <a:noFill/>
+          <a:ln/>
         </p:spPr>
         <p:txBody>
           <a:bodyPr wrap="square" lIns="0" tIns="0" rIns="0" bIns="0" rtlCol="0" anchor="ctr">
@@ -5884,55 +5964,36 @@
               <a:buNone/>
             </a:pPr>
             <a:r>
-              <a:rPr lang="zh-CN" sz="12300" dirty="0">
-                <a:gradFill flip="none" rotWithShape="1">
-                  <a:gsLst>
-                    <a:gs pos="0">
-                      <a:srgbClr val="FFF3D6"/>
-                    </a:gs>
-                    <a:gs pos="50000">
-                      <a:srgbClr val="E6C47E"/>
-                    </a:gs>
-                    <a:gs pos="100000">
-                      <a:srgbClr val="B38842"/>
-                    </a:gs>
-                  </a:gsLst>
-                  <a:lin ang="5400000" scaled="1"/>
-                </a:gradFill>
-                <a:latin typeface="Noto Serif SC Black" pitchFamily="34" charset="0"/>
-                <a:ea typeface="Noto Serif SC Black" pitchFamily="34" charset="-122"/>
-                <a:cs typeface="Noto Serif SC Black" pitchFamily="34" charset="-120"/>
+              <a:rPr lang="zh-CN" sz="7200" dirty="0">
+                <a:solidFill>
+                  <a:srgbClr val="F2EDE4"/>
+                </a:solidFill>
+                <a:latin typeface="Noto Serif SC SemiBold" pitchFamily="34" charset="0"/>
+                <a:ea typeface="Noto Serif SC SemiBold" pitchFamily="34" charset="-122"/>
+                <a:cs typeface="Noto Serif SC SemiBold" pitchFamily="34" charset="-120"/>
               </a:rPr>
               <a:t>海马150 GMT</a:t>
             </a:r>
-            <a:endParaRPr lang="zh-CN" sz="12300" dirty="0"/>
-          </a:p>
-        </p:txBody>
-      </p:sp>
-      <p:sp>
-        <p:nvSpPr>
-          <p:cNvPr id="12" name="服务项目"/>
-          <p:cNvSpPr/>
-          <p:nvPr/>
-        </p:nvSpPr>
-        <p:spPr>
-          <a:xfrm>
-            <a:off x="1619250" y="11258550"/>
-            <a:ext cx="7048500" cy="800100"/>
-          </a:xfrm>
-          <a:prstGeom prst="rect">
-            <a:avLst/>
-          </a:prstGeom>
-          <a:solidFill>
-            <a:srgbClr val="000000">
-              <a:alpha val="45000"/>
-            </a:srgbClr>
-          </a:solidFill>
-          <a:ln w="19050">
-            <a:solidFill>
-              <a:srgbClr val="D6B36E"/>
-            </a:solidFill>
-          </a:ln>
+            <a:endParaRPr lang="zh-CN" sz="7200" dirty="0"/>
+          </a:p>
+        </p:txBody>
+      </p:sp>
+      <p:sp>
+        <p:nvSpPr>
+          <p:cNvPr id="8" name="服务项目"/>
+          <p:cNvSpPr txBox="1"/>
+          <p:nvPr/>
+        </p:nvSpPr>
+        <p:spPr>
+          <a:xfrm>
+            <a:off x="1333500" y="11639550"/>
+            <a:ext cx="7620000" cy="438150"/>
+          </a:xfrm>
+          <a:prstGeom prst="rect">
+            <a:avLst/>
+          </a:prstGeom>
+          <a:noFill/>
+          <a:ln/>
         </p:spPr>
         <p:txBody>
           <a:bodyPr wrap="square" lIns="0" tIns="0" rIns="0" bIns="0" rtlCol="0" anchor="ctr">
@@ -5944,17 +6005,56 @@
               <a:buNone/>
             </a:pPr>
             <a:r>
-              <a:rPr lang="zh-CN" sz="3450" spc="300" kern="0" dirty="0">
-                <a:solidFill>
-                  <a:srgbClr val="F6F1E7"/>
-                </a:solidFill>
-                <a:latin typeface="Noto Serif SC Black" pitchFamily="34" charset="0"/>
-                <a:ea typeface="Noto Serif SC Black" pitchFamily="34" charset="-122"/>
-                <a:cs typeface="Noto Serif SC Black" pitchFamily="34" charset="-120"/>
+              <a:rPr lang="zh-CN" sz="2250" spc="500" kern="0" dirty="0">
+                <a:solidFill>
+                  <a:srgbClr val="A39B8F"/>
+                </a:solidFill>
+                <a:latin typeface="Noto Serif SC" pitchFamily="34" charset="0"/>
+                <a:ea typeface="Noto Serif SC" pitchFamily="34" charset="-122"/>
+                <a:cs typeface="Noto Serif SC" pitchFamily="34" charset="-120"/>
               </a:rPr>
               <a:t>洗油大保养 · 外观修复</a:t>
             </a:r>
-            <a:endParaRPr lang="zh-CN" sz="3450" dirty="0"/>
+            <a:endParaRPr lang="zh-CN" sz="2250" dirty="0"/>
+          </a:p>
+        </p:txBody>
+      </p:sp>
+      <p:sp>
+        <p:nvSpPr>
+          <p:cNvPr id="9" name="期数"/>
+          <p:cNvSpPr txBox="1"/>
+          <p:nvPr/>
+        </p:nvSpPr>
+        <p:spPr>
+          <a:xfrm>
+            <a:off x="7048500" y="12553950"/>
+            <a:ext cx="2400300" cy="552450"/>
+          </a:xfrm>
+          <a:prstGeom prst="rect">
+            <a:avLst/>
+          </a:prstGeom>
+          <a:noFill/>
+          <a:ln/>
+        </p:spPr>
+        <p:txBody>
+          <a:bodyPr wrap="square" lIns="0" tIns="0" rIns="0" bIns="0" rtlCol="0" anchor="ctr"/>
+          <a:lstStyle/>
+          <a:p>
+            <a:pPr algn="r" indent="0" marL="0">
+              <a:buNone/>
+            </a:pPr>
+            <a:r>
+              <a:rPr lang="zh-CN" sz="3000" i="1" dirty="0">
+                <a:solidFill>
+                  <a:srgbClr val="C4A876"/>
+                </a:solidFill>
+                <a:latin typeface="Cormorant Garamond Medium" pitchFamily="34" charset="0"/>
+                <a:ea typeface="Noto Serif SC" pitchFamily="34" charset="-122"/>
+                <a:cs typeface="Noto Serif SC" pitchFamily="34" charset="-120"/>
+              </a:rPr>
+              <a:t>N° 023</a:t>
+            </a:r>
+            <a:endParaRPr lang="zh-CN" sz="3000" dirty="0"/>
           </a:p>
         </p:txBody>
       </p:sp>
@@ -6001,8 +6101,8 @@
         </p:blipFill>
         <p:spPr>
           <a:xfrm>
-            <a:off x="0" y="0"/>
-            <a:ext cx="10287000" cy="13716000"/>
+            <a:off x="609600" y="609600"/>
+            <a:ext cx="9067800" cy="9067800"/>
           </a:xfrm>
           <a:prstGeom prst="rect">
             <a:avLst/>
@@ -6011,7 +6111,7 @@
       </p:pic>
       <p:pic>
         <p:nvPicPr>
-          <p:cNvPr id="3" name="遮罩（勿删）">    </p:cNvPr>
+          <p:cNvPr id="3" name="构图参考线（导出前隐藏）" hidden="1" descr="构图参考线">    </p:cNvPr>
           <p:cNvPicPr>
             <a:picLocks noChangeAspect="1"/>
           </p:cNvPicPr>
@@ -6025,222 +6125,30 @@
         </p:blipFill>
         <p:spPr>
           <a:xfrm>
-            <a:off x="0" y="0"/>
-            <a:ext cx="10287000" cy="3238500"/>
+            <a:off x="609600" y="609600"/>
+            <a:ext cx="9067800" cy="9067800"/>
           </a:xfrm>
           <a:prstGeom prst="rect">
             <a:avLst/>
           </a:prstGeom>
         </p:spPr>
       </p:pic>
-      <p:pic>
-        <p:nvPicPr>
-          <p:cNvPr id="4" name="遮罩（勿删）">    </p:cNvPr>
-          <p:cNvPicPr>
-            <a:picLocks noChangeAspect="1"/>
-          </p:cNvPicPr>
-          <p:nvPr/>
-        </p:nvPicPr>
-        <p:blipFill>
-          <a:blip r:embed="rId3"/>
-          <a:stretch>
-            <a:fillRect/>
-          </a:stretch>
-        </p:blipFill>
-        <p:spPr>
-          <a:xfrm>
-            <a:off x="0" y="3238500"/>
-            <a:ext cx="2857500" cy="4000500"/>
-          </a:xfrm>
-          <a:prstGeom prst="rect">
-            <a:avLst/>
-          </a:prstGeom>
-        </p:spPr>
-      </p:pic>
-      <p:pic>
-        <p:nvPicPr>
-          <p:cNvPr id="5" name="遮罩（勿删）">    </p:cNvPr>
-          <p:cNvPicPr>
-            <a:picLocks noChangeAspect="1"/>
-          </p:cNvPicPr>
-          <p:nvPr/>
-        </p:nvPicPr>
-        <p:blipFill>
-          <a:blip r:embed="rId4"/>
-          <a:stretch>
-            <a:fillRect/>
-          </a:stretch>
-        </p:blipFill>
-        <p:spPr>
-          <a:xfrm>
-            <a:off x="7429500" y="3238500"/>
-            <a:ext cx="2857500" cy="4000500"/>
-          </a:xfrm>
-          <a:prstGeom prst="rect">
-            <a:avLst/>
-          </a:prstGeom>
-        </p:spPr>
-      </p:pic>
-      <p:pic>
-        <p:nvPicPr>
-          <p:cNvPr id="6" name="遮罩（勿删）">    </p:cNvPr>
-          <p:cNvPicPr>
-            <a:picLocks noChangeAspect="1"/>
-          </p:cNvPicPr>
-          <p:nvPr/>
-        </p:nvPicPr>
-        <p:blipFill>
-          <a:blip r:embed="rId5"/>
-          <a:stretch>
-            <a:fillRect/>
-          </a:stretch>
-        </p:blipFill>
-        <p:spPr>
-          <a:xfrm>
-            <a:off x="0" y="7239000"/>
-            <a:ext cx="10287000" cy="6477000"/>
-          </a:xfrm>
-          <a:prstGeom prst="rect">
-            <a:avLst/>
-          </a:prstGeom>
-        </p:spPr>
-      </p:pic>
-      <p:pic>
-        <p:nvPicPr>
-          <p:cNvPr id="7" name="构图参考线（导出前隐藏）" hidden="1">    </p:cNvPr>
-          <p:cNvPicPr>
-            <a:picLocks noChangeAspect="1"/>
-          </p:cNvPicPr>
-          <p:nvPr/>
-        </p:nvPicPr>
-        <p:blipFill>
-          <a:blip r:embed="rId6"/>
-          <a:stretch>
-            <a:fillRect/>
-          </a:stretch>
-        </p:blipFill>
-        <p:spPr>
-          <a:xfrm>
-            <a:off x="0" y="0"/>
-            <a:ext cx="10287000" cy="13716000"/>
-          </a:xfrm>
-          <a:prstGeom prst="rect">
-            <a:avLst/>
-          </a:prstGeom>
-        </p:spPr>
-      </p:pic>
-      <p:sp>
-        <p:nvSpPr>
-          <p:cNvPr id="8" name="期数"/>
-          <p:cNvSpPr/>
-          <p:nvPr/>
-        </p:nvSpPr>
-        <p:spPr>
-          <a:xfrm>
-            <a:off x="7734300" y="476250"/>
-            <a:ext cx="2019300" cy="704850"/>
-          </a:xfrm>
-          <a:prstGeom prst="rect">
-            <a:avLst/>
-          </a:prstGeom>
-          <a:solidFill>
-            <a:srgbClr val="FFD60A"/>
-          </a:solidFill>
-          <a:ln/>
-        </p:spPr>
-        <p:txBody>
-          <a:bodyPr wrap="none" lIns="0" tIns="101600" rIns="101600" bIns="0" rtlCol="0" anchor="ctr">
-            <a:spAutoFit/>
-          </a:bodyPr>
-          <a:lstStyle/>
-          <a:p>
-            <a:pPr algn="r" indent="0" marL="0">
-              <a:buNone/>
-            </a:pPr>
-            <a:r>
-              <a:rPr lang="zh-CN" sz="3000" dirty="0">
-                <a:solidFill>
-                  <a:srgbClr val="0B0A09"/>
-                </a:solidFill>
-                <a:latin typeface="Noto Sans SC Black" pitchFamily="34" charset="0"/>
-                <a:ea typeface="Noto Sans SC Black" pitchFamily="34" charset="-122"/>
-                <a:cs typeface="Noto Sans SC Black" pitchFamily="34" charset="-120"/>
-              </a:rPr>
-              <a:t>第023期</a:t>
-            </a:r>
-            <a:endParaRPr lang="zh-CN" sz="3000" dirty="0"/>
-          </a:p>
-        </p:txBody>
-      </p:sp>
-      <p:sp>
-        <p:nvSpPr>
-          <p:cNvPr id="9" name="店名"/>
-          <p:cNvSpPr txBox="1"/>
-          <p:nvPr/>
-        </p:nvSpPr>
-        <p:spPr>
-          <a:xfrm>
-            <a:off x="2762250" y="542925"/>
-            <a:ext cx="4762500" cy="571500"/>
-          </a:xfrm>
-          <a:prstGeom prst="rect">
-            <a:avLst/>
-          </a:prstGeom>
-          <a:noFill/>
-          <a:ln/>
-          <a:effectLst>
-            <a:outerShdw sx="100000" sy="100000" kx="0" ky="0" algn="bl" rotWithShape="0" blurRad="76200" dist="25400" dir="5400000">
-              <a:srgbClr val="000000">
-                <a:alpha val="65000"/>
-              </a:srgbClr>
-            </a:outerShdw>
-          </a:effectLst>
-        </p:spPr>
-        <p:txBody>
-          <a:bodyPr wrap="square" lIns="0" tIns="0" rIns="0" bIns="0" rtlCol="0" anchor="ctr"/>
-          <a:lstStyle/>
-          <a:p>
-            <a:pPr algn="ctr" indent="0" marL="0">
-              <a:buNone/>
-            </a:pPr>
-            <a:r>
-              <a:rPr lang="zh-CN" sz="2550" dirty="0">
-                <a:solidFill>
-                  <a:srgbClr val="FFFFFF"/>
-                </a:solidFill>
-                <a:latin typeface="Noto Sans SC Black" pitchFamily="34" charset="0"/>
-                <a:ea typeface="Noto Sans SC Black" pitchFamily="34" charset="-122"/>
-                <a:cs typeface="Noto Sans SC Black" pitchFamily="34" charset="-120"/>
-              </a:rPr>
-              <a:t>XX名表维修</a:t>
-            </a:r>
-            <a:endParaRPr lang="zh-CN" sz="2550" dirty="0"/>
-          </a:p>
-        </p:txBody>
-      </p:sp>
-      <p:sp>
-        <p:nvSpPr>
-          <p:cNvPr id="10" name="品牌"/>
-          <p:cNvSpPr txBox="1"/>
-          <p:nvPr/>
-        </p:nvSpPr>
-        <p:spPr>
-          <a:xfrm>
-            <a:off x="609600" y="8286750"/>
-            <a:ext cx="9048750" cy="762000"/>
-          </a:xfrm>
-          <a:prstGeom prst="rect">
-            <a:avLst/>
-          </a:prstGeom>
-          <a:noFill/>
-          <a:ln/>
-          <a:effectLst>
-            <a:outerShdw sx="100000" sy="100000" kx="0" ky="0" algn="bl" rotWithShape="0" blurRad="101600" dist="38100" dir="5400000">
-              <a:srgbClr val="000000">
-                <a:alpha val="65000"/>
-              </a:srgbClr>
-            </a:outerShdw>
-          </a:effectLst>
+      <p:sp>
+        <p:nvSpPr>
+          <p:cNvPr id="4" name="品牌"/>
+          <p:cNvSpPr txBox="1"/>
+          <p:nvPr/>
+        </p:nvSpPr>
+        <p:spPr>
+          <a:xfrm>
+            <a:off x="609600" y="9963150"/>
+            <a:ext cx="6096000" cy="381000"/>
+          </a:xfrm>
+          <a:prstGeom prst="rect">
+            <a:avLst/>
+          </a:prstGeom>
+          <a:noFill/>
+          <a:ln/>
         </p:spPr>
         <p:txBody>
           <a:bodyPr wrap="square" lIns="0" tIns="0" rIns="0" bIns="0" rtlCol="0" anchor="ctr">
@@ -6252,43 +6160,36 @@
               <a:buNone/>
             </a:pPr>
             <a:r>
-              <a:rPr lang="zh-CN" sz="4200" dirty="0">
-                <a:solidFill>
-                  <a:srgbClr val="FFFFFF"/>
-                </a:solidFill>
-                <a:latin typeface="Noto Sans SC Black" pitchFamily="34" charset="0"/>
-                <a:ea typeface="Noto Sans SC Black" pitchFamily="34" charset="-122"/>
-                <a:cs typeface="Noto Sans SC Black" pitchFamily="34" charset="-120"/>
-              </a:rPr>
-              <a:t>OMEGA 欧米茄</a:t>
-            </a:r>
-            <a:endParaRPr lang="zh-CN" sz="4200" dirty="0"/>
-          </a:p>
-        </p:txBody>
-      </p:sp>
-      <p:sp>
-        <p:nvSpPr>
-          <p:cNvPr id="11" name="主标题（型号）"/>
-          <p:cNvSpPr txBox="1"/>
-          <p:nvPr/>
-        </p:nvSpPr>
-        <p:spPr>
-          <a:xfrm>
-            <a:off x="533400" y="8991600"/>
-            <a:ext cx="9334500" cy="2152650"/>
-          </a:xfrm>
-          <a:prstGeom prst="rect">
-            <a:avLst/>
-          </a:prstGeom>
-          <a:noFill/>
-          <a:ln/>
-          <a:effectLst>
-            <a:outerShdw sx="100000" sy="100000" kx="0" ky="0" algn="bl" rotWithShape="0" blurRad="101600" dist="101600" dir="5400000">
-              <a:srgbClr val="000000">
-                <a:alpha val="90000"/>
-              </a:srgbClr>
-            </a:outerShdw>
-          </a:effectLst>
+              <a:rPr lang="zh-CN" sz="2400" spc="900" kern="0" dirty="0">
+                <a:solidFill>
+                  <a:srgbClr val="8A6A3B"/>
+                </a:solidFill>
+                <a:latin typeface="Cormorant Garamond SemiBold" pitchFamily="34" charset="0"/>
+                <a:ea typeface="Noto Serif SC" pitchFamily="34" charset="-122"/>
+                <a:cs typeface="Noto Serif SC" pitchFamily="34" charset="-120"/>
+              </a:rPr>
+              <a:t>OMEGA</a:t>
+            </a:r>
+            <a:endParaRPr lang="zh-CN" sz="2400" dirty="0"/>
+          </a:p>
+        </p:txBody>
+      </p:sp>
+      <p:sp>
+        <p:nvSpPr>
+          <p:cNvPr id="5" name="主标题（型号）"/>
+          <p:cNvSpPr txBox="1"/>
+          <p:nvPr/>
+        </p:nvSpPr>
+        <p:spPr>
+          <a:xfrm>
+            <a:off x="609600" y="10363200"/>
+            <a:ext cx="6667500" cy="1066800"/>
+          </a:xfrm>
+          <a:prstGeom prst="rect">
+            <a:avLst/>
+          </a:prstGeom>
+          <a:noFill/>
+          <a:ln/>
         </p:spPr>
         <p:txBody>
           <a:bodyPr wrap="square" lIns="0" tIns="0" rIns="0" bIns="0" rtlCol="0" anchor="ctr">
@@ -6300,65 +6201,189 @@
               <a:buNone/>
             </a:pPr>
             <a:r>
-              <a:rPr lang="zh-CN" sz="12600" dirty="0">
-                <a:ln w="38100">
-                  <a:solidFill>
-                    <a:srgbClr val="000000"/>
-                  </a:solidFill>
-                </a:ln>
-                <a:solidFill>
-                  <a:srgbClr val="FFD60A"/>
-                </a:solidFill>
-                <a:latin typeface="Noto Sans SC Black" pitchFamily="34" charset="0"/>
-                <a:ea typeface="Noto Sans SC Black" pitchFamily="34" charset="-122"/>
-                <a:cs typeface="Noto Sans SC Black" pitchFamily="34" charset="-120"/>
+              <a:rPr lang="zh-CN" sz="6900" dirty="0">
+                <a:solidFill>
+                  <a:srgbClr val="16140F"/>
+                </a:solidFill>
+                <a:latin typeface="Noto Serif SC SemiBold" pitchFamily="34" charset="0"/>
+                <a:ea typeface="Noto Serif SC SemiBold" pitchFamily="34" charset="-122"/>
+                <a:cs typeface="Noto Serif SC SemiBold" pitchFamily="34" charset="-120"/>
               </a:rPr>
               <a:t>海马150 GMT</a:t>
             </a:r>
-            <a:endParaRPr lang="zh-CN" sz="12600" dirty="0"/>
-          </a:p>
-        </p:txBody>
-      </p:sp>
-      <p:sp>
-        <p:nvSpPr>
-          <p:cNvPr id="12" name="服务项目"/>
-          <p:cNvSpPr/>
-          <p:nvPr/>
-        </p:nvSpPr>
-        <p:spPr>
-          <a:xfrm>
-            <a:off x="609600" y="11277600"/>
-            <a:ext cx="6096000" cy="800100"/>
-          </a:xfrm>
-          <a:prstGeom prst="rect">
-            <a:avLst/>
-          </a:prstGeom>
-          <a:solidFill>
-            <a:srgbClr val="FFD60A"/>
-          </a:solidFill>
-          <a:ln/>
-        </p:spPr>
-        <p:txBody>
-          <a:bodyPr wrap="none" lIns="0" tIns="127000" rIns="127000" bIns="0" rtlCol="0" anchor="ctr">
-            <a:spAutoFit/>
+            <a:endParaRPr lang="zh-CN" sz="6900" dirty="0"/>
+          </a:p>
+        </p:txBody>
+      </p:sp>
+      <p:sp>
+        <p:nvSpPr>
+          <p:cNvPr id="6" name="服务项目"/>
+          <p:cNvSpPr txBox="1"/>
+          <p:nvPr/>
+        </p:nvSpPr>
+        <p:spPr>
+          <a:xfrm>
+            <a:off x="609600" y="11487150"/>
+            <a:ext cx="6667500" cy="419100"/>
+          </a:xfrm>
+          <a:prstGeom prst="rect">
+            <a:avLst/>
+          </a:prstGeom>
+          <a:noFill/>
+          <a:ln/>
+        </p:spPr>
+        <p:txBody>
+          <a:bodyPr wrap="square" lIns="0" tIns="0" rIns="0" bIns="0" rtlCol="0" anchor="ctr">
+            <a:normAutofit/>
           </a:bodyPr>
           <a:lstStyle/>
           <a:p>
-            <a:pPr algn="ctr" indent="0" marL="0">
-              <a:buNone/>
-            </a:pPr>
-            <a:r>
-              <a:rPr lang="zh-CN" sz="3750" dirty="0">
-                <a:solidFill>
-                  <a:srgbClr val="0B0A09"/>
-                </a:solidFill>
-                <a:latin typeface="Noto Sans SC Black" pitchFamily="34" charset="0"/>
-                <a:ea typeface="Noto Sans SC Black" pitchFamily="34" charset="-122"/>
-                <a:cs typeface="Noto Sans SC Black" pitchFamily="34" charset="-120"/>
-              </a:rPr>
-              <a:t>洗油大保养 + 外观修复</a:t>
-            </a:r>
-            <a:endParaRPr lang="zh-CN" sz="3750" dirty="0"/>
+            <a:pPr indent="0" marL="0">
+              <a:buNone/>
+            </a:pPr>
+            <a:r>
+              <a:rPr lang="zh-CN" sz="2250" spc="300" kern="0" dirty="0">
+                <a:solidFill>
+                  <a:srgbClr val="4A453D"/>
+                </a:solidFill>
+                <a:latin typeface="Noto Serif SC" pitchFamily="34" charset="0"/>
+                <a:ea typeface="Noto Serif SC" pitchFamily="34" charset="-122"/>
+                <a:cs typeface="Noto Serif SC" pitchFamily="34" charset="-120"/>
+              </a:rPr>
+              <a:t>洗油大保养 · 外观修复</a:t>
+            </a:r>
+            <a:endParaRPr lang="zh-CN" sz="2250" dirty="0"/>
+          </a:p>
+        </p:txBody>
+      </p:sp>
+      <p:sp>
+        <p:nvSpPr>
+          <p:cNvPr id="7" name="N°"/>
+          <p:cNvSpPr txBox="1"/>
+          <p:nvPr/>
+        </p:nvSpPr>
+        <p:spPr>
+          <a:xfrm>
+            <a:off x="8001000" y="10020300"/>
+            <a:ext cx="1676400" cy="381000"/>
+          </a:xfrm>
+          <a:prstGeom prst="rect">
+            <a:avLst/>
+          </a:prstGeom>
+          <a:noFill/>
+          <a:ln/>
+        </p:spPr>
+        <p:txBody>
+          <a:bodyPr wrap="square" lIns="0" tIns="0" rIns="0" bIns="0" rtlCol="0" anchor="ctr"/>
+          <a:lstStyle/>
+          <a:p>
+            <a:pPr algn="r" indent="0" marL="0">
+              <a:buNone/>
+            </a:pPr>
+            <a:r>
+              <a:rPr lang="zh-CN" sz="2700" i="1" dirty="0">
+                <a:solidFill>
+                  <a:srgbClr val="8A6A3B"/>
+                </a:solidFill>
+                <a:latin typeface="Cormorant Garamond Medium" pitchFamily="34" charset="0"/>
+                <a:ea typeface="Noto Serif SC" pitchFamily="34" charset="-122"/>
+                <a:cs typeface="Noto Serif SC" pitchFamily="34" charset="-120"/>
+              </a:rPr>
+              <a:t>N°</a:t>
+            </a:r>
+            <a:endParaRPr lang="zh-CN" sz="2700" dirty="0"/>
+          </a:p>
+        </p:txBody>
+      </p:sp>
+      <p:sp>
+        <p:nvSpPr>
+          <p:cNvPr id="8" name="期数"/>
+          <p:cNvSpPr txBox="1"/>
+          <p:nvPr/>
+        </p:nvSpPr>
+        <p:spPr>
+          <a:xfrm>
+            <a:off x="7239000" y="10287000"/>
+            <a:ext cx="2495550" cy="1428750"/>
+          </a:xfrm>
+          <a:prstGeom prst="rect">
+            <a:avLst/>
+          </a:prstGeom>
+          <a:noFill/>
+          <a:ln/>
+        </p:spPr>
+        <p:txBody>
+          <a:bodyPr wrap="square" lIns="0" tIns="0" rIns="0" bIns="0" rtlCol="0" anchor="ctr"/>
+          <a:lstStyle/>
+          <a:p>
+            <a:pPr algn="r" indent="0" marL="0">
+              <a:buNone/>
+            </a:pPr>
+            <a:r>
+              <a:rPr lang="zh-CN" sz="10350" i="1" dirty="0">
+                <a:solidFill>
+                  <a:srgbClr val="8A6A3B"/>
+                </a:solidFill>
+                <a:latin typeface="Cormorant Garamond Medium" pitchFamily="34" charset="0"/>
+                <a:ea typeface="Noto Serif SC" pitchFamily="34" charset="-122"/>
+                <a:cs typeface="Noto Serif SC" pitchFamily="34" charset="-120"/>
+              </a:rPr>
+              <a:t>023</a:t>
+            </a:r>
+            <a:endParaRPr lang="zh-CN" sz="10350" dirty="0"/>
+          </a:p>
+        </p:txBody>
+      </p:sp>
+      <p:sp>
+        <p:nvSpPr>
+          <p:cNvPr id="9" name="店名"/>
+          <p:cNvSpPr txBox="1"/>
+          <p:nvPr/>
+        </p:nvSpPr>
+        <p:spPr>
+          <a:xfrm>
+            <a:off x="3810000" y="12439650"/>
+            <a:ext cx="5867400" cy="381000"/>
+          </a:xfrm>
+          <a:prstGeom prst="rect">
+            <a:avLst/>
+          </a:prstGeom>
+          <a:noFill/>
+          <a:ln/>
+        </p:spPr>
+        <p:txBody>
+          <a:bodyPr wrap="square" lIns="0" tIns="0" rIns="0" bIns="0" rtlCol="0" anchor="ctr"/>
+          <a:lstStyle/>
+          <a:p>
+            <a:pPr algn="r" indent="0" marL="0">
+              <a:buNone/>
+            </a:pPr>
+            <a:r>
+              <a:rPr lang="zh-CN" sz="1650" spc="400" kern="0" dirty="0">
+                <a:solidFill>
+                  <a:srgbClr val="4A453D"/>
+                </a:solidFill>
+                <a:latin typeface="Noto Serif SC" pitchFamily="34" charset="0"/>
+                <a:ea typeface="Noto Serif SC" pitchFamily="34" charset="-122"/>
+                <a:cs typeface="Noto Serif SC" pitchFamily="34" charset="-120"/>
+              </a:rPr>
+              <a:t>名表维修工作室</a:t>
+            </a:r>
+            <a:pPr algn="r" indent="0" marL="0">
+              <a:buNone/>
+            </a:pPr>
+            <a:r>
+              <a:rPr lang="zh-CN" sz="1575" spc="400" kern="0" dirty="0">
+                <a:solidFill>
+                  <a:srgbClr val="4A453D"/>
+                </a:solidFill>
+                <a:latin typeface="Cormorant Garamond SemiBold" pitchFamily="34" charset="0"/>
+                <a:ea typeface="Noto Serif SC" pitchFamily="34" charset="-122"/>
+                <a:cs typeface="Noto Serif SC" pitchFamily="34" charset="-120"/>
+              </a:rPr>
+              <a:t>  ·  WATCH SERVICE ATELIER</a:t>
+            </a:r>
+            <a:endParaRPr lang="zh-CN" sz="1650" dirty="0"/>
           </a:p>
         </p:txBody>
       </p:sp>
@@ -6405,8 +6430,8 @@
         </p:blipFill>
         <p:spPr>
           <a:xfrm>
-            <a:off x="0" y="0"/>
-            <a:ext cx="10287000" cy="13716000"/>
+            <a:off x="685800" y="1524000"/>
+            <a:ext cx="8915400" cy="7696200"/>
           </a:xfrm>
           <a:prstGeom prst="rect">
             <a:avLst/>
@@ -6415,7 +6440,7 @@
       </p:pic>
       <p:pic>
         <p:nvPicPr>
-          <p:cNvPr id="3" name="遮罩（勿删）">    </p:cNvPr>
+          <p:cNvPr id="3" name="构图参考线（导出前隐藏）" hidden="1" descr="构图参考线">    </p:cNvPr>
           <p:cNvPicPr>
             <a:picLocks noChangeAspect="1"/>
           </p:cNvPicPr>
@@ -6429,151 +6454,48 @@
         </p:blipFill>
         <p:spPr>
           <a:xfrm>
-            <a:off x="0" y="0"/>
-            <a:ext cx="10287000" cy="3238500"/>
+            <a:off x="685800" y="1524000"/>
+            <a:ext cx="8915400" cy="7696200"/>
           </a:xfrm>
           <a:prstGeom prst="rect">
             <a:avLst/>
           </a:prstGeom>
         </p:spPr>
       </p:pic>
-      <p:pic>
-        <p:nvPicPr>
-          <p:cNvPr id="4" name="遮罩（勿删）">    </p:cNvPr>
-          <p:cNvPicPr>
-            <a:picLocks noChangeAspect="1"/>
-          </p:cNvPicPr>
-          <p:nvPr/>
-        </p:nvPicPr>
-        <p:blipFill>
-          <a:blip r:embed="rId3"/>
-          <a:stretch>
-            <a:fillRect/>
-          </a:stretch>
-        </p:blipFill>
-        <p:spPr>
-          <a:xfrm>
-            <a:off x="0" y="3238500"/>
-            <a:ext cx="2857500" cy="4000500"/>
-          </a:xfrm>
-          <a:prstGeom prst="rect">
-            <a:avLst/>
-          </a:prstGeom>
-        </p:spPr>
-      </p:pic>
-      <p:pic>
-        <p:nvPicPr>
-          <p:cNvPr id="5" name="遮罩（勿删）">    </p:cNvPr>
-          <p:cNvPicPr>
-            <a:picLocks noChangeAspect="1"/>
-          </p:cNvPicPr>
-          <p:nvPr/>
-        </p:nvPicPr>
-        <p:blipFill>
-          <a:blip r:embed="rId4"/>
-          <a:stretch>
-            <a:fillRect/>
-          </a:stretch>
-        </p:blipFill>
-        <p:spPr>
-          <a:xfrm>
-            <a:off x="7429500" y="3238500"/>
-            <a:ext cx="2857500" cy="4000500"/>
-          </a:xfrm>
-          <a:prstGeom prst="rect">
-            <a:avLst/>
-          </a:prstGeom>
-        </p:spPr>
-      </p:pic>
-      <p:pic>
-        <p:nvPicPr>
-          <p:cNvPr id="6" name="遮罩（勿删）">    </p:cNvPr>
-          <p:cNvPicPr>
-            <a:picLocks noChangeAspect="1"/>
-          </p:cNvPicPr>
-          <p:nvPr/>
-        </p:nvPicPr>
-        <p:blipFill>
-          <a:blip r:embed="rId5"/>
-          <a:stretch>
-            <a:fillRect/>
-          </a:stretch>
-        </p:blipFill>
-        <p:spPr>
-          <a:xfrm>
-            <a:off x="0" y="7239000"/>
-            <a:ext cx="10287000" cy="6477000"/>
-          </a:xfrm>
-          <a:prstGeom prst="rect">
-            <a:avLst/>
-          </a:prstGeom>
-        </p:spPr>
-      </p:pic>
-      <p:pic>
-        <p:nvPicPr>
-          <p:cNvPr id="7" name="构图参考线（导出前隐藏）" hidden="1">    </p:cNvPr>
-          <p:cNvPicPr>
-            <a:picLocks noChangeAspect="1"/>
-          </p:cNvPicPr>
-          <p:nvPr/>
-        </p:nvPicPr>
-        <p:blipFill>
-          <a:blip r:embed="rId6"/>
-          <a:stretch>
-            <a:fillRect/>
-          </a:stretch>
-        </p:blipFill>
-        <p:spPr>
-          <a:xfrm>
-            <a:off x="0" y="0"/>
-            <a:ext cx="10287000" cy="13716000"/>
-          </a:xfrm>
-          <a:prstGeom prst="rect">
-            <a:avLst/>
-          </a:prstGeom>
-        </p:spPr>
-      </p:pic>
-      <p:sp>
-        <p:nvSpPr>
-          <p:cNvPr id="8" name="店名"/>
-          <p:cNvSpPr txBox="1"/>
-          <p:nvPr/>
-        </p:nvSpPr>
-        <p:spPr>
-          <a:xfrm>
-            <a:off x="2762250" y="495300"/>
-            <a:ext cx="4762500" cy="609600"/>
-          </a:xfrm>
-          <a:prstGeom prst="rect">
-            <a:avLst/>
-          </a:prstGeom>
-          <a:noFill/>
-          <a:ln/>
-          <a:effectLst>
-            <a:outerShdw sx="100000" sy="100000" kx="0" ky="0" algn="bl" rotWithShape="0" blurRad="76200" dist="25400" dir="5400000">
-              <a:srgbClr val="000000">
-                <a:alpha val="65000"/>
-              </a:srgbClr>
-            </a:outerShdw>
-          </a:effectLst>
+      <p:sp>
+        <p:nvSpPr>
+          <p:cNvPr id="4" name="期数"/>
+          <p:cNvSpPr txBox="1"/>
+          <p:nvPr/>
+        </p:nvSpPr>
+        <p:spPr>
+          <a:xfrm>
+            <a:off x="7239000" y="628650"/>
+            <a:ext cx="2362200" cy="571500"/>
+          </a:xfrm>
+          <a:prstGeom prst="rect">
+            <a:avLst/>
+          </a:prstGeom>
+          <a:noFill/>
+          <a:ln/>
         </p:spPr>
         <p:txBody>
           <a:bodyPr wrap="square" lIns="0" tIns="0" rIns="0" bIns="0" rtlCol="0" anchor="ctr"/>
           <a:lstStyle/>
           <a:p>
-            <a:pPr algn="ctr" indent="0" marL="0">
-              <a:buNone/>
-            </a:pPr>
-            <a:r>
-              <a:rPr lang="zh-CN" sz="3150" dirty="0">
-                <a:solidFill>
-                  <a:srgbClr val="FFFFFF"/>
-                </a:solidFill>
-                <a:latin typeface="Smiley Sans Oblique" pitchFamily="34" charset="0"/>
-                <a:ea typeface="Smiley Sans Oblique" pitchFamily="34" charset="-122"/>
-                <a:cs typeface="Smiley Sans Oblique" pitchFamily="34" charset="-120"/>
-              </a:rPr>
-              <a:t>XX名表维修</a:t>
+            <a:pPr algn="r" indent="0" marL="0">
+              <a:buNone/>
+            </a:pPr>
+            <a:r>
+              <a:rPr lang="zh-CN" sz="3150" i="1" dirty="0">
+                <a:solidFill>
+                  <a:srgbClr val="B0925F"/>
+                </a:solidFill>
+                <a:latin typeface="Cormorant Garamond Medium" pitchFamily="34" charset="0"/>
+                <a:ea typeface="Noto Serif SC" pitchFamily="34" charset="-122"/>
+                <a:cs typeface="Noto Serif SC" pitchFamily="34" charset="-120"/>
+              </a:rPr>
+              <a:t>N° 023</a:t>
             </a:r>
             <a:endParaRPr lang="zh-CN" sz="3150" dirty="0"/>
           </a:p>
@@ -6581,121 +6503,20 @@
       </p:sp>
       <p:sp>
         <p:nvSpPr>
-          <p:cNvPr id="9" name="期数"/>
-          <p:cNvSpPr txBox="1"/>
-          <p:nvPr/>
-        </p:nvSpPr>
-        <p:spPr>
-          <a:xfrm>
-            <a:off x="7581900" y="419100"/>
-            <a:ext cx="2133600" cy="762000"/>
-          </a:xfrm>
-          <a:prstGeom prst="rect">
-            <a:avLst/>
-          </a:prstGeom>
-          <a:noFill/>
-          <a:ln/>
-          <a:effectLst>
-            <a:outerShdw sx="100000" sy="100000" kx="0" ky="0" algn="bl" rotWithShape="0" blurRad="76200" dist="25400" dir="5400000">
-              <a:srgbClr val="000000">
-                <a:alpha val="65000"/>
-              </a:srgbClr>
-            </a:outerShdw>
-          </a:effectLst>
-        </p:spPr>
-        <p:txBody>
-          <a:bodyPr wrap="square" lIns="0" tIns="0" rIns="0" bIns="0" rtlCol="0" anchor="ctr"/>
-          <a:lstStyle/>
-          <a:p>
-            <a:pPr algn="r" indent="0" marL="0">
-              <a:buNone/>
-            </a:pPr>
-            <a:r>
-              <a:rPr lang="zh-CN" sz="5100" dirty="0">
-                <a:solidFill>
-                  <a:srgbClr val="E9C77B"/>
-                </a:solidFill>
-                <a:latin typeface="Smiley Sans Oblique" pitchFamily="34" charset="0"/>
-                <a:ea typeface="Smiley Sans Oblique" pitchFamily="34" charset="-122"/>
-                <a:cs typeface="Smiley Sans Oblique" pitchFamily="34" charset="-120"/>
-              </a:rPr>
-              <a:t>NO.023</a:t>
-            </a:r>
-            <a:endParaRPr lang="zh-CN" sz="5100" dirty="0"/>
-          </a:p>
-        </p:txBody>
-      </p:sp>
-      <p:sp>
-        <p:nvSpPr>
-          <p:cNvPr id="10" name="斜带（服务项目）"/>
-          <p:cNvSpPr/>
-          <p:nvPr/>
-        </p:nvSpPr>
-        <p:spPr>
-          <a:xfrm rot="-540000">
-            <a:off x="-2000250" y="7239000"/>
-            <a:ext cx="14287500" cy="990600"/>
-          </a:xfrm>
-          <a:prstGeom prst="rect">
-            <a:avLst/>
-          </a:prstGeom>
-          <a:solidFill>
-            <a:srgbClr val="E9C77B"/>
-          </a:solidFill>
-          <a:ln/>
-          <a:effectLst>
-            <a:outerShdw sx="100000" sy="100000" kx="0" ky="0" algn="bl" rotWithShape="0" blurRad="228600" dist="76200" dir="5400000">
-              <a:srgbClr val="000000">
-                <a:alpha val="55000"/>
-              </a:srgbClr>
-            </a:outerShdw>
-          </a:effectLst>
-        </p:spPr>
-        <p:txBody>
-          <a:bodyPr wrap="square" lIns="0" tIns="0" rIns="0" bIns="0" rtlCol="0" anchor="ctr"/>
-          <a:lstStyle/>
-          <a:p>
-            <a:pPr algn="ctr" indent="0" marL="0">
-              <a:buNone/>
-            </a:pPr>
-            <a:r>
-              <a:rPr lang="zh-CN" sz="4650" spc="400" kern="0" dirty="0">
-                <a:solidFill>
-                  <a:srgbClr val="1A1408"/>
-                </a:solidFill>
-                <a:latin typeface="Smiley Sans Oblique" pitchFamily="34" charset="0"/>
-                <a:ea typeface="Smiley Sans Oblique" pitchFamily="34" charset="-122"/>
-                <a:cs typeface="Smiley Sans Oblique" pitchFamily="34" charset="-120"/>
-              </a:rPr>
-              <a:t>洗油大保养 · 外观修复</a:t>
-            </a:r>
-            <a:endParaRPr lang="zh-CN" sz="4650" dirty="0"/>
-          </a:p>
-        </p:txBody>
-      </p:sp>
-      <p:sp>
-        <p:nvSpPr>
-          <p:cNvPr id="11" name="主标题（型号）"/>
-          <p:cNvSpPr txBox="1"/>
-          <p:nvPr/>
-        </p:nvSpPr>
-        <p:spPr>
-          <a:xfrm>
-            <a:off x="533400" y="9124950"/>
-            <a:ext cx="9334500" cy="2038350"/>
-          </a:xfrm>
-          <a:prstGeom prst="rect">
-            <a:avLst/>
-          </a:prstGeom>
-          <a:noFill/>
-          <a:ln/>
-          <a:effectLst>
-            <a:outerShdw sx="100000" sy="100000" kx="0" ky="0" algn="bl" rotWithShape="0" blurRad="177800" dist="63500" dir="5400000">
-              <a:srgbClr val="000000">
-                <a:alpha val="80000"/>
-              </a:srgbClr>
-            </a:outerShdw>
-          </a:effectLst>
+          <p:cNvPr id="5" name="主标题（型号）"/>
+          <p:cNvSpPr txBox="1"/>
+          <p:nvPr/>
+        </p:nvSpPr>
+        <p:spPr>
+          <a:xfrm>
+            <a:off x="685800" y="9601200"/>
+            <a:ext cx="8915400" cy="1143000"/>
+          </a:xfrm>
+          <a:prstGeom prst="rect">
+            <a:avLst/>
+          </a:prstGeom>
+          <a:noFill/>
+          <a:ln/>
         </p:spPr>
         <p:txBody>
           <a:bodyPr wrap="square" lIns="0" tIns="0" rIns="0" bIns="0" rtlCol="0" anchor="ctr">
@@ -6707,43 +6528,36 @@
               <a:buNone/>
             </a:pPr>
             <a:r>
-              <a:rPr lang="zh-CN" sz="13800" dirty="0">
-                <a:solidFill>
-                  <a:srgbClr val="FFFFFF"/>
-                </a:solidFill>
-                <a:latin typeface="Smiley Sans Oblique" pitchFamily="34" charset="0"/>
-                <a:ea typeface="Smiley Sans Oblique" pitchFamily="34" charset="-122"/>
-                <a:cs typeface="Smiley Sans Oblique" pitchFamily="34" charset="-120"/>
+              <a:rPr lang="zh-CN" sz="6600" dirty="0">
+                <a:solidFill>
+                  <a:srgbClr val="EDE8E0"/>
+                </a:solidFill>
+                <a:latin typeface="Noto Serif SC SemiBold" pitchFamily="34" charset="0"/>
+                <a:ea typeface="Noto Serif SC SemiBold" pitchFamily="34" charset="-122"/>
+                <a:cs typeface="Noto Serif SC SemiBold" pitchFamily="34" charset="-120"/>
               </a:rPr>
               <a:t>海马150 GMT</a:t>
             </a:r>
-            <a:endParaRPr lang="zh-CN" sz="13800" dirty="0"/>
-          </a:p>
-        </p:txBody>
-      </p:sp>
-      <p:sp>
-        <p:nvSpPr>
-          <p:cNvPr id="12" name="品牌"/>
-          <p:cNvSpPr txBox="1"/>
-          <p:nvPr/>
-        </p:nvSpPr>
-        <p:spPr>
-          <a:xfrm>
-            <a:off x="609600" y="11163300"/>
-            <a:ext cx="9048750" cy="762000"/>
-          </a:xfrm>
-          <a:prstGeom prst="rect">
-            <a:avLst/>
-          </a:prstGeom>
-          <a:noFill/>
-          <a:ln/>
-          <a:effectLst>
-            <a:outerShdw sx="100000" sy="100000" kx="0" ky="0" algn="bl" rotWithShape="0" blurRad="101600" dist="38100" dir="5400000">
-              <a:srgbClr val="000000">
-                <a:alpha val="65000"/>
-              </a:srgbClr>
-            </a:outerShdw>
-          </a:effectLst>
+            <a:endParaRPr lang="zh-CN" sz="6600" dirty="0"/>
+          </a:p>
+        </p:txBody>
+      </p:sp>
+      <p:sp>
+        <p:nvSpPr>
+          <p:cNvPr id="6" name="品牌"/>
+          <p:cNvSpPr txBox="1"/>
+          <p:nvPr/>
+        </p:nvSpPr>
+        <p:spPr>
+          <a:xfrm>
+            <a:off x="3143250" y="10934700"/>
+            <a:ext cx="6457950" cy="552450"/>
+          </a:xfrm>
+          <a:prstGeom prst="rect">
+            <a:avLst/>
+          </a:prstGeom>
+          <a:noFill/>
+          <a:ln/>
         </p:spPr>
         <p:txBody>
           <a:bodyPr wrap="square" lIns="0" tIns="0" rIns="0" bIns="0" rtlCol="0" anchor="ctr">
@@ -6755,17 +6569,111 @@
               <a:buNone/>
             </a:pPr>
             <a:r>
-              <a:rPr lang="zh-CN" sz="4350" dirty="0">
-                <a:solidFill>
-                  <a:srgbClr val="E9C77B"/>
-                </a:solidFill>
-                <a:latin typeface="Smiley Sans Oblique" pitchFamily="34" charset="0"/>
-                <a:ea typeface="Smiley Sans Oblique" pitchFamily="34" charset="-122"/>
-                <a:cs typeface="Smiley Sans Oblique" pitchFamily="34" charset="-120"/>
-              </a:rPr>
-              <a:t>OMEGA 欧米茄</a:t>
-            </a:r>
-            <a:endParaRPr lang="zh-CN" sz="4350" dirty="0"/>
+              <a:rPr lang="zh-CN" sz="2250" dirty="0">
+                <a:solidFill>
+                  <a:srgbClr val="D9D3C8"/>
+                </a:solidFill>
+                <a:latin typeface="Noto Serif SC" pitchFamily="34" charset="0"/>
+                <a:ea typeface="Noto Serif SC" pitchFamily="34" charset="-122"/>
+                <a:cs typeface="Noto Serif SC" pitchFamily="34" charset="-120"/>
+              </a:rPr>
+              <a:t>OMEGA</a:t>
+            </a:r>
+            <a:endParaRPr lang="zh-CN" sz="2250" dirty="0"/>
+          </a:p>
+        </p:txBody>
+      </p:sp>
+      <p:sp>
+        <p:nvSpPr>
+          <p:cNvPr id="7" name="服务项目"/>
+          <p:cNvSpPr txBox="1"/>
+          <p:nvPr/>
+        </p:nvSpPr>
+        <p:spPr>
+          <a:xfrm>
+            <a:off x="3143250" y="11525250"/>
+            <a:ext cx="6457950" cy="552450"/>
+          </a:xfrm>
+          <a:prstGeom prst="rect">
+            <a:avLst/>
+          </a:prstGeom>
+          <a:noFill/>
+          <a:ln/>
+        </p:spPr>
+        <p:txBody>
+          <a:bodyPr wrap="square" lIns="0" tIns="0" rIns="0" bIns="0" rtlCol="0" anchor="ctr">
+            <a:normAutofit/>
+          </a:bodyPr>
+          <a:lstStyle/>
+          <a:p>
+            <a:pPr indent="0" marL="0">
+              <a:buNone/>
+            </a:pPr>
+            <a:r>
+              <a:rPr lang="zh-CN" sz="2250" dirty="0">
+                <a:solidFill>
+                  <a:srgbClr val="D9D3C8"/>
+                </a:solidFill>
+                <a:latin typeface="Noto Serif SC" pitchFamily="34" charset="0"/>
+                <a:ea typeface="Noto Serif SC" pitchFamily="34" charset="-122"/>
+                <a:cs typeface="Noto Serif SC" pitchFamily="34" charset="-120"/>
+              </a:rPr>
+              <a:t>洗油大保养 · 外观修复</a:t>
+            </a:r>
+            <a:endParaRPr lang="zh-CN" sz="2250" dirty="0"/>
+          </a:p>
+        </p:txBody>
+      </p:sp>
+      <p:sp>
+        <p:nvSpPr>
+          <p:cNvPr id="8" name="店名"/>
+          <p:cNvSpPr txBox="1"/>
+          <p:nvPr/>
+        </p:nvSpPr>
+        <p:spPr>
+          <a:xfrm>
+            <a:off x="3810000" y="12553950"/>
+            <a:ext cx="5791200" cy="381000"/>
+          </a:xfrm>
+          <a:prstGeom prst="rect">
+            <a:avLst/>
+          </a:prstGeom>
+          <a:noFill/>
+          <a:ln/>
+        </p:spPr>
+        <p:txBody>
+          <a:bodyPr wrap="square" lIns="0" tIns="0" rIns="0" bIns="0" rtlCol="0" anchor="ctr"/>
+          <a:lstStyle/>
+          <a:p>
+            <a:pPr algn="r" indent="0" marL="0">
+              <a:buNone/>
+            </a:pPr>
+            <a:r>
+              <a:rPr lang="zh-CN" sz="1650" spc="400" kern="0" dirty="0">
+                <a:solidFill>
+                  <a:srgbClr val="8A857C"/>
+                </a:solidFill>
+                <a:latin typeface="Noto Serif SC" pitchFamily="34" charset="0"/>
+                <a:ea typeface="Noto Serif SC" pitchFamily="34" charset="-122"/>
+                <a:cs typeface="Noto Serif SC" pitchFamily="34" charset="-120"/>
+              </a:rPr>
+              <a:t>名表维修工作室</a:t>
+            </a:r>
+            <a:pPr algn="r" indent="0" marL="0">
+              <a:buNone/>
+            </a:pPr>
+            <a:r>
+              <a:rPr lang="zh-CN" sz="1575" spc="400" kern="0" dirty="0">
+                <a:solidFill>
+                  <a:srgbClr val="8A857C"/>
+                </a:solidFill>
+                <a:latin typeface="Cormorant Garamond SemiBold" pitchFamily="34" charset="0"/>
+                <a:ea typeface="Noto Serif SC" pitchFamily="34" charset="-122"/>
+                <a:cs typeface="Noto Serif SC" pitchFamily="34" charset="-120"/>
+              </a:rPr>
+              <a:t>  ·  WATCH SERVICE ATELIER</a:t>
+            </a:r>
+            <a:endParaRPr lang="zh-CN" sz="1650" dirty="0"/>
           </a:p>
         </p:txBody>
       </p:sp>
@@ -6820,7 +6728,7 @@
     </a:clrScheme>
     <a:fontScheme name="Office">
       <a:majorFont>
-        <a:latin typeface="Noto Sans SC Black"/>
+        <a:latin typeface="Noto Serif SC SemiBold"/>
         <a:ea typeface=""/>
         <a:cs typeface=""/>
         <a:font script="Jpan" typeface="游ゴシック Light"/>

--- a/douyin-cover/抖音封面模板.pptx
+++ b/douyin-cover/抖音封面模板.pptx
@@ -113,7 +113,7 @@
   <p:extLst>
     <p:ext uri="{521415D9-36F7-43E2-AB2F-B90AF26B5E84}">
       <p14:sectionLst xmlns:p14="http://schemas.microsoft.com/office/powerpoint/2010/main">
-        <p14:section name="使用说明" id="{1dd85d2c-24e8-272a-1e9f-9c1112494566}">
+        <p14:section name="使用说明" id="{f7b593f9-1ec1-c327-f260-6ee7b0ac8e66}">
           <p14:sldIdLst>
             <p14:sldId id="256"/>
             <p14:sldId id="257"/>
@@ -121,7 +121,7 @@
             <p14:sldId id="259"/>
           </p14:sldIdLst>
         </p14:section>
-        <p14:section name="封面模板" id="{2c1011c7-2198-4fe3-068f-a36edb0460bb}">
+        <p14:section name="封面模板" id="{c6f666d5-c5b9-59bd-d346-9932ec1b8853}">
           <p14:sldIdLst>
             <p14:sldId id="260"/>
             <p14:sldId id="261"/>
